--- a/Presentation/presentation.pptx
+++ b/Presentation/presentation.pptx
@@ -1,41 +1,41 @@
 
 <file path=ppt/presentation.xml><?xml version="1.0" encoding="utf-8"?>
-<p:presentation xmlns:a="http://schemas.openxmlformats.org/drawingml/2006/main" xmlns:r="http://schemas.openxmlformats.org/officeDocument/2006/relationships" xmlns:p="http://schemas.openxmlformats.org/presentationml/2006/main" saveSubsetFonts="1" embedTrueTypeFonts="true">
+<p:presentation xmlns:a="http://schemas.openxmlformats.org/drawingml/2006/main" xmlns:r="http://schemas.openxmlformats.org/officeDocument/2006/relationships" xmlns:p="http://schemas.openxmlformats.org/presentationml/2006/main" embedTrueTypeFonts="1" saveSubsetFonts="1">
   <p:sldMasterIdLst>
     <p:sldMasterId id="2147483648" r:id="rId1"/>
   </p:sldMasterIdLst>
   <p:sldIdLst>
-    <p:sldId id="256" r:id="rId6"/>
-    <p:sldId id="257" r:id="rId7"/>
-    <p:sldId id="258" r:id="rId8"/>
-    <p:sldId id="259" r:id="rId9"/>
-    <p:sldId id="260" r:id="rId10"/>
-    <p:sldId id="261" r:id="rId11"/>
-    <p:sldId id="262" r:id="rId12"/>
-    <p:sldId id="263" r:id="rId13"/>
+    <p:sldId id="256" r:id="rId2"/>
+    <p:sldId id="257" r:id="rId3"/>
+    <p:sldId id="258" r:id="rId4"/>
+    <p:sldId id="259" r:id="rId5"/>
+    <p:sldId id="260" r:id="rId6"/>
+    <p:sldId id="261" r:id="rId7"/>
+    <p:sldId id="262" r:id="rId8"/>
+    <p:sldId id="263" r:id="rId9"/>
   </p:sldIdLst>
   <p:sldSz cx="18288000" cy="10287000"/>
   <p:notesSz cx="6858000" cy="9144000"/>
   <p:embeddedFontLst>
     <p:embeddedFont>
-      <p:font typeface="League Spartan" charset="1" panose="00000800000000000000"/>
-      <p:regular r:id="rId14"/>
+      <p:font typeface="League Spartan" panose="020B0604020202020204" charset="0"/>
+      <p:regular r:id="rId10"/>
     </p:embeddedFont>
     <p:embeddedFont>
-      <p:font typeface="Poppins Bold" charset="1" panose="00000800000000000000"/>
-      <p:regular r:id="rId15"/>
+      <p:font typeface="Poppins" panose="020B0502040204020203" pitchFamily="2" charset="0"/>
+      <p:regular r:id="rId11"/>
     </p:embeddedFont>
     <p:embeddedFont>
-      <p:font typeface="Poppins" charset="1" panose="00000500000000000000"/>
-      <p:regular r:id="rId16"/>
+      <p:font typeface="Poppins Bold" panose="020B0604020202020204" charset="0"/>
+      <p:regular r:id="rId12"/>
     </p:embeddedFont>
     <p:embeddedFont>
-      <p:font typeface="Roboto Bold" charset="1" panose="02000000000000000000"/>
-      <p:regular r:id="rId17"/>
+      <p:font typeface="Roboto" panose="02000000000000000000" pitchFamily="2" charset="0"/>
+      <p:regular r:id="rId13"/>
     </p:embeddedFont>
     <p:embeddedFont>
-      <p:font typeface="Roboto" charset="1" panose="02000000000000000000"/>
-      <p:regular r:id="rId18"/>
+      <p:font typeface="Roboto Bold" panose="020B0604020202020204" charset="0"/>
+      <p:regular r:id="rId14"/>
     </p:embeddedFont>
   </p:embeddedFontLst>
   <p:defaultTextStyle>
@@ -133,6 +133,22 @@
       </a:defRPr>
     </a:lvl9pPr>
   </p:defaultTextStyle>
+  <p:extLst>
+    <p:ext uri="{EFAFB233-063F-42B5-8137-9DF3F51BA10A}">
+      <p15:sldGuideLst xmlns:p15="http://schemas.microsoft.com/office/powerpoint/2012/main">
+        <p15:guide id="1" orient="horz" pos="2160">
+          <p15:clr>
+            <a:srgbClr val="A4A3A4"/>
+          </p15:clr>
+        </p15:guide>
+        <p15:guide id="2" pos="2880">
+          <p15:clr>
+            <a:srgbClr val="A4A3A4"/>
+          </p15:clr>
+        </p15:guide>
+      </p15:sldGuideLst>
+    </p:ext>
+  </p:extLst>
 </p:presentation>
 </file>
 
@@ -174,10 +190,9 @@
           <a:lstStyle/>
           <a:p>
             <a:r>
-              <a:rPr lang="en-US" smtClean="0"/>
+              <a:rPr lang="en-US"/>
               <a:t>Click to edit Master title style</a:t>
             </a:r>
-            <a:endParaRPr lang="en-US"/>
           </a:p>
         </p:txBody>
       </p:sp>
@@ -293,10 +308,9 @@
           </a:lstStyle>
           <a:p>
             <a:r>
-              <a:rPr lang="en-US" smtClean="0"/>
+              <a:rPr lang="en-US"/>
               <a:t>Click to edit Master subtitle style</a:t>
             </a:r>
-            <a:endParaRPr lang="en-US"/>
           </a:p>
         </p:txBody>
       </p:sp>
@@ -318,7 +332,7 @@
             <a:fld id="{1D8BD707-D9CF-40AE-B4C6-C98DA3205C09}" type="datetimeFigureOut">
               <a:rPr lang="en-US" smtClean="0"/>
               <a:pPr/>
-              <a:t>8/1/2011</a:t>
+              <a:t>3/2/2026</a:t>
             </a:fld>
             <a:endParaRPr lang="en-US"/>
           </a:p>
@@ -408,10 +422,9 @@
           <a:lstStyle/>
           <a:p>
             <a:r>
-              <a:rPr lang="en-US" smtClean="0"/>
+              <a:rPr lang="en-US"/>
               <a:t>Click to edit Master title style</a:t>
             </a:r>
-            <a:endParaRPr lang="en-US"/>
           </a:p>
         </p:txBody>
       </p:sp>
@@ -432,38 +445,37 @@
           <a:p>
             <a:pPr lvl="0"/>
             <a:r>
-              <a:rPr lang="en-US" smtClean="0"/>
+              <a:rPr lang="en-US"/>
               <a:t>Click to edit Master text styles</a:t>
             </a:r>
           </a:p>
           <a:p>
             <a:pPr lvl="1"/>
             <a:r>
-              <a:rPr lang="en-US" smtClean="0"/>
+              <a:rPr lang="en-US"/>
               <a:t>Second level</a:t>
             </a:r>
           </a:p>
           <a:p>
             <a:pPr lvl="2"/>
             <a:r>
-              <a:rPr lang="en-US" smtClean="0"/>
+              <a:rPr lang="en-US"/>
               <a:t>Third level</a:t>
             </a:r>
           </a:p>
           <a:p>
             <a:pPr lvl="3"/>
             <a:r>
-              <a:rPr lang="en-US" smtClean="0"/>
+              <a:rPr lang="en-US"/>
               <a:t>Fourth level</a:t>
             </a:r>
           </a:p>
           <a:p>
             <a:pPr lvl="4"/>
             <a:r>
-              <a:rPr lang="en-US" smtClean="0"/>
+              <a:rPr lang="en-US"/>
               <a:t>Fifth level</a:t>
             </a:r>
-            <a:endParaRPr lang="en-US"/>
           </a:p>
         </p:txBody>
       </p:sp>
@@ -485,7 +497,7 @@
             <a:fld id="{1D8BD707-D9CF-40AE-B4C6-C98DA3205C09}" type="datetimeFigureOut">
               <a:rPr lang="en-US" smtClean="0"/>
               <a:pPr/>
-              <a:t>8/1/2011</a:t>
+              <a:t>3/2/2026</a:t>
             </a:fld>
             <a:endParaRPr lang="en-US"/>
           </a:p>
@@ -580,10 +592,9 @@
           <a:lstStyle/>
           <a:p>
             <a:r>
-              <a:rPr lang="en-US" smtClean="0"/>
+              <a:rPr lang="en-US"/>
               <a:t>Click to edit Master title style</a:t>
             </a:r>
-            <a:endParaRPr lang="en-US"/>
           </a:p>
         </p:txBody>
       </p:sp>
@@ -609,38 +620,37 @@
           <a:p>
             <a:pPr lvl="0"/>
             <a:r>
-              <a:rPr lang="en-US" smtClean="0"/>
+              <a:rPr lang="en-US"/>
               <a:t>Click to edit Master text styles</a:t>
             </a:r>
           </a:p>
           <a:p>
             <a:pPr lvl="1"/>
             <a:r>
-              <a:rPr lang="en-US" smtClean="0"/>
+              <a:rPr lang="en-US"/>
               <a:t>Second level</a:t>
             </a:r>
           </a:p>
           <a:p>
             <a:pPr lvl="2"/>
             <a:r>
-              <a:rPr lang="en-US" smtClean="0"/>
+              <a:rPr lang="en-US"/>
               <a:t>Third level</a:t>
             </a:r>
           </a:p>
           <a:p>
             <a:pPr lvl="3"/>
             <a:r>
-              <a:rPr lang="en-US" smtClean="0"/>
+              <a:rPr lang="en-US"/>
               <a:t>Fourth level</a:t>
             </a:r>
           </a:p>
           <a:p>
             <a:pPr lvl="4"/>
             <a:r>
-              <a:rPr lang="en-US" smtClean="0"/>
+              <a:rPr lang="en-US"/>
               <a:t>Fifth level</a:t>
             </a:r>
-            <a:endParaRPr lang="en-US"/>
           </a:p>
         </p:txBody>
       </p:sp>
@@ -662,7 +672,7 @@
             <a:fld id="{1D8BD707-D9CF-40AE-B4C6-C98DA3205C09}" type="datetimeFigureOut">
               <a:rPr lang="en-US" smtClean="0"/>
               <a:pPr/>
-              <a:t>8/1/2011</a:t>
+              <a:t>3/2/2026</a:t>
             </a:fld>
             <a:endParaRPr lang="en-US"/>
           </a:p>
@@ -752,10 +762,9 @@
           <a:lstStyle/>
           <a:p>
             <a:r>
-              <a:rPr lang="en-US" smtClean="0"/>
+              <a:rPr lang="en-US"/>
               <a:t>Click to edit Master title style</a:t>
             </a:r>
-            <a:endParaRPr lang="en-US"/>
           </a:p>
         </p:txBody>
       </p:sp>
@@ -776,38 +785,37 @@
           <a:p>
             <a:pPr lvl="0"/>
             <a:r>
-              <a:rPr lang="en-US" smtClean="0"/>
+              <a:rPr lang="en-US"/>
               <a:t>Click to edit Master text styles</a:t>
             </a:r>
           </a:p>
           <a:p>
             <a:pPr lvl="1"/>
             <a:r>
-              <a:rPr lang="en-US" smtClean="0"/>
+              <a:rPr lang="en-US"/>
               <a:t>Second level</a:t>
             </a:r>
           </a:p>
           <a:p>
             <a:pPr lvl="2"/>
             <a:r>
-              <a:rPr lang="en-US" smtClean="0"/>
+              <a:rPr lang="en-US"/>
               <a:t>Third level</a:t>
             </a:r>
           </a:p>
           <a:p>
             <a:pPr lvl="3"/>
             <a:r>
-              <a:rPr lang="en-US" smtClean="0"/>
+              <a:rPr lang="en-US"/>
               <a:t>Fourth level</a:t>
             </a:r>
           </a:p>
           <a:p>
             <a:pPr lvl="4"/>
             <a:r>
-              <a:rPr lang="en-US" smtClean="0"/>
+              <a:rPr lang="en-US"/>
               <a:t>Fifth level</a:t>
             </a:r>
-            <a:endParaRPr lang="en-US"/>
           </a:p>
         </p:txBody>
       </p:sp>
@@ -829,7 +837,7 @@
             <a:fld id="{1D8BD707-D9CF-40AE-B4C6-C98DA3205C09}" type="datetimeFigureOut">
               <a:rPr lang="en-US" smtClean="0"/>
               <a:pPr/>
-              <a:t>8/1/2011</a:t>
+              <a:t>3/2/2026</a:t>
             </a:fld>
             <a:endParaRPr lang="en-US"/>
           </a:p>
@@ -928,10 +936,9 @@
           </a:lstStyle>
           <a:p>
             <a:r>
-              <a:rPr lang="en-US" smtClean="0"/>
+              <a:rPr lang="en-US"/>
               <a:t>Click to edit Master title style</a:t>
             </a:r>
-            <a:endParaRPr lang="en-US"/>
           </a:p>
         </p:txBody>
       </p:sp>
@@ -1048,7 +1055,7 @@
           <a:p>
             <a:pPr lvl="0"/>
             <a:r>
-              <a:rPr lang="en-US" smtClean="0"/>
+              <a:rPr lang="en-US"/>
               <a:t>Click to edit Master text styles</a:t>
             </a:r>
           </a:p>
@@ -1072,7 +1079,7 @@
             <a:fld id="{1D8BD707-D9CF-40AE-B4C6-C98DA3205C09}" type="datetimeFigureOut">
               <a:rPr lang="en-US" smtClean="0"/>
               <a:pPr/>
-              <a:t>8/1/2011</a:t>
+              <a:t>3/2/2026</a:t>
             </a:fld>
             <a:endParaRPr lang="en-US"/>
           </a:p>
@@ -1162,10 +1169,9 @@
           <a:lstStyle/>
           <a:p>
             <a:r>
-              <a:rPr lang="en-US" smtClean="0"/>
+              <a:rPr lang="en-US"/>
               <a:t>Click to edit Master title style</a:t>
             </a:r>
-            <a:endParaRPr lang="en-US"/>
           </a:p>
         </p:txBody>
       </p:sp>
@@ -1219,38 +1225,37 @@
           <a:p>
             <a:pPr lvl="0"/>
             <a:r>
-              <a:rPr lang="en-US" smtClean="0"/>
+              <a:rPr lang="en-US"/>
               <a:t>Click to edit Master text styles</a:t>
             </a:r>
           </a:p>
           <a:p>
             <a:pPr lvl="1"/>
             <a:r>
-              <a:rPr lang="en-US" smtClean="0"/>
+              <a:rPr lang="en-US"/>
               <a:t>Second level</a:t>
             </a:r>
           </a:p>
           <a:p>
             <a:pPr lvl="2"/>
             <a:r>
-              <a:rPr lang="en-US" smtClean="0"/>
+              <a:rPr lang="en-US"/>
               <a:t>Third level</a:t>
             </a:r>
           </a:p>
           <a:p>
             <a:pPr lvl="3"/>
             <a:r>
-              <a:rPr lang="en-US" smtClean="0"/>
+              <a:rPr lang="en-US"/>
               <a:t>Fourth level</a:t>
             </a:r>
           </a:p>
           <a:p>
             <a:pPr lvl="4"/>
             <a:r>
-              <a:rPr lang="en-US" smtClean="0"/>
+              <a:rPr lang="en-US"/>
               <a:t>Fifth level</a:t>
             </a:r>
-            <a:endParaRPr lang="en-US"/>
           </a:p>
         </p:txBody>
       </p:sp>
@@ -1304,38 +1309,37 @@
           <a:p>
             <a:pPr lvl="0"/>
             <a:r>
-              <a:rPr lang="en-US" smtClean="0"/>
+              <a:rPr lang="en-US"/>
               <a:t>Click to edit Master text styles</a:t>
             </a:r>
           </a:p>
           <a:p>
             <a:pPr lvl="1"/>
             <a:r>
-              <a:rPr lang="en-US" smtClean="0"/>
+              <a:rPr lang="en-US"/>
               <a:t>Second level</a:t>
             </a:r>
           </a:p>
           <a:p>
             <a:pPr lvl="2"/>
             <a:r>
-              <a:rPr lang="en-US" smtClean="0"/>
+              <a:rPr lang="en-US"/>
               <a:t>Third level</a:t>
             </a:r>
           </a:p>
           <a:p>
             <a:pPr lvl="3"/>
             <a:r>
-              <a:rPr lang="en-US" smtClean="0"/>
+              <a:rPr lang="en-US"/>
               <a:t>Fourth level</a:t>
             </a:r>
           </a:p>
           <a:p>
             <a:pPr lvl="4"/>
             <a:r>
-              <a:rPr lang="en-US" smtClean="0"/>
+              <a:rPr lang="en-US"/>
               <a:t>Fifth level</a:t>
             </a:r>
-            <a:endParaRPr lang="en-US"/>
           </a:p>
         </p:txBody>
       </p:sp>
@@ -1357,7 +1361,7 @@
             <a:fld id="{1D8BD707-D9CF-40AE-B4C6-C98DA3205C09}" type="datetimeFigureOut">
               <a:rPr lang="en-US" smtClean="0"/>
               <a:pPr/>
-              <a:t>8/1/2011</a:t>
+              <a:t>3/2/2026</a:t>
             </a:fld>
             <a:endParaRPr lang="en-US"/>
           </a:p>
@@ -1451,10 +1455,9 @@
           </a:lstStyle>
           <a:p>
             <a:r>
-              <a:rPr lang="en-US" smtClean="0"/>
+              <a:rPr lang="en-US"/>
               <a:t>Click to edit Master title style</a:t>
             </a:r>
-            <a:endParaRPr lang="en-US"/>
           </a:p>
         </p:txBody>
       </p:sp>
@@ -1517,7 +1520,7 @@
           <a:p>
             <a:pPr lvl="0"/>
             <a:r>
-              <a:rPr lang="en-US" smtClean="0"/>
+              <a:rPr lang="en-US"/>
               <a:t>Click to edit Master text styles</a:t>
             </a:r>
           </a:p>
@@ -1573,38 +1576,37 @@
           <a:p>
             <a:pPr lvl="0"/>
             <a:r>
-              <a:rPr lang="en-US" smtClean="0"/>
+              <a:rPr lang="en-US"/>
               <a:t>Click to edit Master text styles</a:t>
             </a:r>
           </a:p>
           <a:p>
             <a:pPr lvl="1"/>
             <a:r>
-              <a:rPr lang="en-US" smtClean="0"/>
+              <a:rPr lang="en-US"/>
               <a:t>Second level</a:t>
             </a:r>
           </a:p>
           <a:p>
             <a:pPr lvl="2"/>
             <a:r>
-              <a:rPr lang="en-US" smtClean="0"/>
+              <a:rPr lang="en-US"/>
               <a:t>Third level</a:t>
             </a:r>
           </a:p>
           <a:p>
             <a:pPr lvl="3"/>
             <a:r>
-              <a:rPr lang="en-US" smtClean="0"/>
+              <a:rPr lang="en-US"/>
               <a:t>Fourth level</a:t>
             </a:r>
           </a:p>
           <a:p>
             <a:pPr lvl="4"/>
             <a:r>
-              <a:rPr lang="en-US" smtClean="0"/>
+              <a:rPr lang="en-US"/>
               <a:t>Fifth level</a:t>
             </a:r>
-            <a:endParaRPr lang="en-US"/>
           </a:p>
         </p:txBody>
       </p:sp>
@@ -1667,7 +1669,7 @@
           <a:p>
             <a:pPr lvl="0"/>
             <a:r>
-              <a:rPr lang="en-US" smtClean="0"/>
+              <a:rPr lang="en-US"/>
               <a:t>Click to edit Master text styles</a:t>
             </a:r>
           </a:p>
@@ -1723,38 +1725,37 @@
           <a:p>
             <a:pPr lvl="0"/>
             <a:r>
-              <a:rPr lang="en-US" smtClean="0"/>
+              <a:rPr lang="en-US"/>
               <a:t>Click to edit Master text styles</a:t>
             </a:r>
           </a:p>
           <a:p>
             <a:pPr lvl="1"/>
             <a:r>
-              <a:rPr lang="en-US" smtClean="0"/>
+              <a:rPr lang="en-US"/>
               <a:t>Second level</a:t>
             </a:r>
           </a:p>
           <a:p>
             <a:pPr lvl="2"/>
             <a:r>
-              <a:rPr lang="en-US" smtClean="0"/>
+              <a:rPr lang="en-US"/>
               <a:t>Third level</a:t>
             </a:r>
           </a:p>
           <a:p>
             <a:pPr lvl="3"/>
             <a:r>
-              <a:rPr lang="en-US" smtClean="0"/>
+              <a:rPr lang="en-US"/>
               <a:t>Fourth level</a:t>
             </a:r>
           </a:p>
           <a:p>
             <a:pPr lvl="4"/>
             <a:r>
-              <a:rPr lang="en-US" smtClean="0"/>
+              <a:rPr lang="en-US"/>
               <a:t>Fifth level</a:t>
             </a:r>
-            <a:endParaRPr lang="en-US"/>
           </a:p>
         </p:txBody>
       </p:sp>
@@ -1776,7 +1777,7 @@
             <a:fld id="{1D8BD707-D9CF-40AE-B4C6-C98DA3205C09}" type="datetimeFigureOut">
               <a:rPr lang="en-US" smtClean="0"/>
               <a:pPr/>
-              <a:t>8/1/2011</a:t>
+              <a:t>3/2/2026</a:t>
             </a:fld>
             <a:endParaRPr lang="en-US"/>
           </a:p>
@@ -1866,10 +1867,9 @@
           <a:lstStyle/>
           <a:p>
             <a:r>
-              <a:rPr lang="en-US" smtClean="0"/>
+              <a:rPr lang="en-US"/>
               <a:t>Click to edit Master title style</a:t>
             </a:r>
-            <a:endParaRPr lang="en-US"/>
           </a:p>
         </p:txBody>
       </p:sp>
@@ -1891,7 +1891,7 @@
             <a:fld id="{1D8BD707-D9CF-40AE-B4C6-C98DA3205C09}" type="datetimeFigureOut">
               <a:rPr lang="en-US" smtClean="0"/>
               <a:pPr/>
-              <a:t>8/1/2011</a:t>
+              <a:t>3/2/2026</a:t>
             </a:fld>
             <a:endParaRPr lang="en-US"/>
           </a:p>
@@ -1983,7 +1983,7 @@
             <a:fld id="{1D8BD707-D9CF-40AE-B4C6-C98DA3205C09}" type="datetimeFigureOut">
               <a:rPr lang="en-US" smtClean="0"/>
               <a:pPr/>
-              <a:t>8/1/2011</a:t>
+              <a:t>3/2/2026</a:t>
             </a:fld>
             <a:endParaRPr lang="en-US"/>
           </a:p>
@@ -2082,10 +2082,9 @@
           </a:lstStyle>
           <a:p>
             <a:r>
-              <a:rPr lang="en-US" smtClean="0"/>
+              <a:rPr lang="en-US"/>
               <a:t>Click to edit Master title style</a:t>
             </a:r>
-            <a:endParaRPr lang="en-US"/>
           </a:p>
         </p:txBody>
       </p:sp>
@@ -2139,38 +2138,37 @@
           <a:p>
             <a:pPr lvl="0"/>
             <a:r>
-              <a:rPr lang="en-US" smtClean="0"/>
+              <a:rPr lang="en-US"/>
               <a:t>Click to edit Master text styles</a:t>
             </a:r>
           </a:p>
           <a:p>
             <a:pPr lvl="1"/>
             <a:r>
-              <a:rPr lang="en-US" smtClean="0"/>
+              <a:rPr lang="en-US"/>
               <a:t>Second level</a:t>
             </a:r>
           </a:p>
           <a:p>
             <a:pPr lvl="2"/>
             <a:r>
-              <a:rPr lang="en-US" smtClean="0"/>
+              <a:rPr lang="en-US"/>
               <a:t>Third level</a:t>
             </a:r>
           </a:p>
           <a:p>
             <a:pPr lvl="3"/>
             <a:r>
-              <a:rPr lang="en-US" smtClean="0"/>
+              <a:rPr lang="en-US"/>
               <a:t>Fourth level</a:t>
             </a:r>
           </a:p>
           <a:p>
             <a:pPr lvl="4"/>
             <a:r>
-              <a:rPr lang="en-US" smtClean="0"/>
+              <a:rPr lang="en-US"/>
               <a:t>Fifth level</a:t>
             </a:r>
-            <a:endParaRPr lang="en-US"/>
           </a:p>
         </p:txBody>
       </p:sp>
@@ -2233,7 +2231,7 @@
           <a:p>
             <a:pPr lvl="0"/>
             <a:r>
-              <a:rPr lang="en-US" smtClean="0"/>
+              <a:rPr lang="en-US"/>
               <a:t>Click to edit Master text styles</a:t>
             </a:r>
           </a:p>
@@ -2257,7 +2255,7 @@
             <a:fld id="{1D8BD707-D9CF-40AE-B4C6-C98DA3205C09}" type="datetimeFigureOut">
               <a:rPr lang="en-US" smtClean="0"/>
               <a:pPr/>
-              <a:t>8/1/2011</a:t>
+              <a:t>3/2/2026</a:t>
             </a:fld>
             <a:endParaRPr lang="en-US"/>
           </a:p>
@@ -2356,10 +2354,9 @@
           </a:lstStyle>
           <a:p>
             <a:r>
-              <a:rPr lang="en-US" smtClean="0"/>
+              <a:rPr lang="en-US"/>
               <a:t>Click to edit Master title style</a:t>
             </a:r>
-            <a:endParaRPr lang="en-US"/>
           </a:p>
         </p:txBody>
       </p:sp>
@@ -2483,7 +2480,7 @@
           <a:p>
             <a:pPr lvl="0"/>
             <a:r>
-              <a:rPr lang="en-US" smtClean="0"/>
+              <a:rPr lang="en-US"/>
               <a:t>Click to edit Master text styles</a:t>
             </a:r>
           </a:p>
@@ -2507,7 +2504,7 @@
             <a:fld id="{1D8BD707-D9CF-40AE-B4C6-C98DA3205C09}" type="datetimeFigureOut">
               <a:rPr lang="en-US" smtClean="0"/>
               <a:pPr/>
-              <a:t>8/1/2011</a:t>
+              <a:t>3/2/2026</a:t>
             </a:fld>
             <a:endParaRPr lang="en-US"/>
           </a:p>
@@ -2612,10 +2609,9 @@
           <a:lstStyle/>
           <a:p>
             <a:r>
-              <a:rPr lang="en-US" smtClean="0"/>
+              <a:rPr lang="en-US"/>
               <a:t>Click to edit Master title style</a:t>
             </a:r>
-            <a:endParaRPr lang="en-US"/>
           </a:p>
         </p:txBody>
       </p:sp>
@@ -2646,38 +2642,37 @@
           <a:p>
             <a:pPr lvl="0"/>
             <a:r>
-              <a:rPr lang="en-US" smtClean="0"/>
+              <a:rPr lang="en-US"/>
               <a:t>Click to edit Master text styles</a:t>
             </a:r>
           </a:p>
           <a:p>
             <a:pPr lvl="1"/>
             <a:r>
-              <a:rPr lang="en-US" smtClean="0"/>
+              <a:rPr lang="en-US"/>
               <a:t>Second level</a:t>
             </a:r>
           </a:p>
           <a:p>
             <a:pPr lvl="2"/>
             <a:r>
-              <a:rPr lang="en-US" smtClean="0"/>
+              <a:rPr lang="en-US"/>
               <a:t>Third level</a:t>
             </a:r>
           </a:p>
           <a:p>
             <a:pPr lvl="3"/>
             <a:r>
-              <a:rPr lang="en-US" smtClean="0"/>
+              <a:rPr lang="en-US"/>
               <a:t>Fourth level</a:t>
             </a:r>
           </a:p>
           <a:p>
             <a:pPr lvl="4"/>
             <a:r>
-              <a:rPr lang="en-US" smtClean="0"/>
+              <a:rPr lang="en-US"/>
               <a:t>Fifth level</a:t>
             </a:r>
-            <a:endParaRPr lang="en-US"/>
           </a:p>
         </p:txBody>
       </p:sp>
@@ -2717,7 +2712,7 @@
             <a:fld id="{1D8BD707-D9CF-40AE-B4C6-C98DA3205C09}" type="datetimeFigureOut">
               <a:rPr lang="en-US" smtClean="0"/>
               <a:pPr/>
-              <a:t>8/1/2011</a:t>
+              <a:t>3/2/2026</a:t>
             </a:fld>
             <a:endParaRPr lang="en-US"/>
           </a:p>
@@ -3072,7 +3067,7 @@
 </file>
 
 <file path=ppt/slides/slide1.xml><?xml version="1.0" encoding="utf-8"?>
-<p:sld xmlns:p="http://schemas.openxmlformats.org/presentationml/2006/main" xmlns:a="http://schemas.openxmlformats.org/drawingml/2006/main" xmlns:r="http://schemas.openxmlformats.org/officeDocument/2006/relationships">
+<p:sld xmlns:a="http://schemas.openxmlformats.org/drawingml/2006/main" xmlns:r="http://schemas.openxmlformats.org/officeDocument/2006/relationships" xmlns:p="http://schemas.openxmlformats.org/presentationml/2006/main">
   <p:cSld>
     <p:spTree>
       <p:nvGrpSpPr>
@@ -3090,12 +3085,12 @@
       </p:grpSpPr>
       <p:sp>
         <p:nvSpPr>
-          <p:cNvPr name="Freeform 2" id="2"/>
+          <p:cNvPr id="2" name="Freeform 2"/>
           <p:cNvSpPr/>
           <p:nvPr/>
         </p:nvSpPr>
         <p:spPr>
-          <a:xfrm flipH="false" flipV="false" rot="0">
+          <a:xfrm>
             <a:off x="0" y="0"/>
             <a:ext cx="18288000" cy="10287000"/>
           </a:xfrm>
@@ -3104,9 +3099,9 @@
             <a:gdLst/>
             <a:ahLst/>
             <a:cxnLst/>
-            <a:rect r="r" b="b" t="t" l="l"/>
+            <a:rect l="l" t="t" r="r" b="b"/>
             <a:pathLst>
-              <a:path h="10287000" w="18288000">
+              <a:path w="18288000" h="10287000">
                 <a:moveTo>
                   <a:pt x="0" y="0"/>
                 </a:moveTo>
@@ -3129,19 +3124,19 @@
           <a:blipFill>
             <a:blip r:embed="rId2"/>
             <a:stretch>
-              <a:fillRect l="0" t="0" r="0" b="0"/>
+              <a:fillRect/>
             </a:stretch>
           </a:blipFill>
         </p:spPr>
       </p:sp>
       <p:sp>
         <p:nvSpPr>
-          <p:cNvPr name="TextBox 3" id="3"/>
-          <p:cNvSpPr txBox="true"/>
+          <p:cNvPr id="3" name="TextBox 3"/>
+          <p:cNvSpPr txBox="1"/>
           <p:nvPr/>
         </p:nvSpPr>
         <p:spPr>
-          <a:xfrm rot="0">
+          <a:xfrm>
             <a:off x="1820657" y="1447456"/>
             <a:ext cx="15438643" cy="4352523"/>
           </a:xfrm>
@@ -3150,7 +3145,7 @@
           </a:prstGeom>
         </p:spPr>
         <p:txBody>
-          <a:bodyPr anchor="t" rtlCol="false" tIns="0" lIns="0" bIns="0" rIns="0">
+          <a:bodyPr lIns="0" tIns="0" rIns="0" bIns="0" rtlCol="0" anchor="t">
             <a:spAutoFit/>
           </a:bodyPr>
           <a:lstStyle/>
@@ -3161,7 +3156,7 @@
               </a:lnSpc>
             </a:pPr>
             <a:r>
-              <a:rPr lang="en-US" b="true" sz="8265">
+              <a:rPr lang="en-US" sz="8265" b="1">
                 <a:solidFill>
                   <a:srgbClr val="004AAD"/>
                 </a:solidFill>
@@ -3179,17 +3174,26 @@
                 <a:spcPts val="11572"/>
               </a:lnSpc>
             </a:pPr>
+            <a:endParaRPr lang="en-US" sz="8265" b="1">
+              <a:solidFill>
+                <a:srgbClr val="004AAD"/>
+              </a:solidFill>
+              <a:latin typeface="League Spartan"/>
+              <a:ea typeface="League Spartan"/>
+              <a:cs typeface="League Spartan"/>
+              <a:sym typeface="League Spartan"/>
+            </a:endParaRPr>
           </a:p>
         </p:txBody>
       </p:sp>
       <p:grpSp>
         <p:nvGrpSpPr>
-          <p:cNvPr name="Group 4" id="4"/>
+          <p:cNvPr id="4" name="Group 4"/>
           <p:cNvGrpSpPr/>
           <p:nvPr/>
         </p:nvGrpSpPr>
         <p:grpSpPr>
-          <a:xfrm rot="0">
+          <a:xfrm>
             <a:off x="-1130300" y="4057750"/>
             <a:ext cx="3086100" cy="2171499"/>
             <a:chOff x="0" y="0"/>
@@ -3198,12 +3202,12 @@
         </p:grpSpPr>
         <p:sp>
           <p:nvSpPr>
-            <p:cNvPr name="Freeform 5" id="5"/>
+            <p:cNvPr id="5" name="Freeform 5"/>
             <p:cNvSpPr/>
             <p:nvPr/>
           </p:nvSpPr>
           <p:spPr>
-            <a:xfrm flipH="false" flipV="false" rot="0">
+            <a:xfrm>
               <a:off x="0" y="0"/>
               <a:ext cx="812800" cy="571917"/>
             </a:xfrm>
@@ -3212,9 +3216,9 @@
               <a:gdLst/>
               <a:ahLst/>
               <a:cxnLst/>
-              <a:rect r="r" b="b" t="t" l="l"/>
+              <a:rect l="l" t="t" r="r" b="b"/>
               <a:pathLst>
-                <a:path h="571917" w="812800">
+                <a:path w="812800" h="571917">
                   <a:moveTo>
                     <a:pt x="609600" y="0"/>
                   </a:moveTo>
@@ -3252,8 +3256,8 @@
         </p:sp>
         <p:sp>
           <p:nvSpPr>
-            <p:cNvPr name="TextBox 6" id="6"/>
-            <p:cNvSpPr txBox="true"/>
+            <p:cNvPr id="6" name="TextBox 6"/>
+            <p:cNvSpPr txBox="1"/>
             <p:nvPr/>
           </p:nvSpPr>
           <p:spPr>
@@ -3266,7 +3270,7 @@
             </a:prstGeom>
           </p:spPr>
           <p:txBody>
-            <a:bodyPr anchor="ctr" rtlCol="false" tIns="50800" lIns="50800" bIns="50800" rIns="50800"/>
+            <a:bodyPr lIns="50800" tIns="50800" rIns="50800" bIns="50800" rtlCol="0" anchor="ctr"/>
             <a:lstStyle/>
             <a:p>
               <a:pPr algn="ctr">
@@ -3274,18 +3278,19 @@
                   <a:spcPts val="2659"/>
                 </a:lnSpc>
               </a:pPr>
+              <a:endParaRPr/>
             </a:p>
           </p:txBody>
         </p:sp>
       </p:grpSp>
       <p:sp>
         <p:nvSpPr>
-          <p:cNvPr name="TextBox 7" id="7"/>
-          <p:cNvSpPr txBox="true"/>
+          <p:cNvPr id="7" name="TextBox 7"/>
+          <p:cNvSpPr txBox="1"/>
           <p:nvPr/>
         </p:nvSpPr>
         <p:spPr>
-          <a:xfrm rot="0">
+          <a:xfrm>
             <a:off x="3941573" y="7268711"/>
             <a:ext cx="10853339" cy="3018289"/>
           </a:xfrm>
@@ -3294,7 +3299,7 @@
           </a:prstGeom>
         </p:spPr>
         <p:txBody>
-          <a:bodyPr anchor="t" rtlCol="false" tIns="0" lIns="0" bIns="0" rIns="0">
+          <a:bodyPr lIns="0" tIns="0" rIns="0" bIns="0" rtlCol="0" anchor="t">
             <a:spAutoFit/>
           </a:bodyPr>
           <a:lstStyle/>
@@ -3305,7 +3310,7 @@
               </a:lnSpc>
             </a:pPr>
             <a:r>
-              <a:rPr lang="en-US" sz="3419" b="true">
+              <a:rPr lang="en-US" sz="3419" b="1">
                 <a:solidFill>
                   <a:srgbClr val="303642"/>
                 </a:solidFill>
@@ -3335,6 +3340,15 @@
                 <a:spcPts val="4787"/>
               </a:lnSpc>
             </a:pPr>
+            <a:endParaRPr lang="en-US" sz="3419">
+              <a:solidFill>
+                <a:srgbClr val="303642"/>
+              </a:solidFill>
+              <a:latin typeface="Poppins"/>
+              <a:ea typeface="Poppins"/>
+              <a:cs typeface="Poppins"/>
+              <a:sym typeface="Poppins"/>
+            </a:endParaRPr>
           </a:p>
           <a:p>
             <a:pPr algn="ctr">
@@ -3343,7 +3357,7 @@
               </a:lnSpc>
             </a:pPr>
             <a:r>
-              <a:rPr lang="en-US" sz="3419" b="true">
+              <a:rPr lang="en-US" sz="3419" b="1">
                 <a:solidFill>
                   <a:srgbClr val="303642"/>
                 </a:solidFill>
@@ -3376,17 +3390,26 @@
                 <a:spcPct val="0"/>
               </a:spcBef>
             </a:pPr>
+            <a:endParaRPr lang="en-US" sz="3419">
+              <a:solidFill>
+                <a:srgbClr val="303642"/>
+              </a:solidFill>
+              <a:latin typeface="Poppins"/>
+              <a:ea typeface="Poppins"/>
+              <a:cs typeface="Poppins"/>
+              <a:sym typeface="Poppins"/>
+            </a:endParaRPr>
           </a:p>
         </p:txBody>
       </p:sp>
       <p:grpSp>
         <p:nvGrpSpPr>
-          <p:cNvPr name="Group 8" id="8"/>
+          <p:cNvPr id="8" name="Group 8"/>
           <p:cNvGrpSpPr/>
           <p:nvPr/>
         </p:nvGrpSpPr>
         <p:grpSpPr>
-          <a:xfrm rot="0">
+          <a:xfrm>
             <a:off x="16467343" y="4057750"/>
             <a:ext cx="3086100" cy="2171499"/>
             <a:chOff x="0" y="0"/>
@@ -3395,12 +3418,12 @@
         </p:grpSpPr>
         <p:sp>
           <p:nvSpPr>
-            <p:cNvPr name="Freeform 9" id="9"/>
+            <p:cNvPr id="9" name="Freeform 9"/>
             <p:cNvSpPr/>
             <p:nvPr/>
           </p:nvSpPr>
           <p:spPr>
-            <a:xfrm flipH="false" flipV="false" rot="0">
+            <a:xfrm>
               <a:off x="0" y="0"/>
               <a:ext cx="812800" cy="571917"/>
             </a:xfrm>
@@ -3409,9 +3432,9 @@
               <a:gdLst/>
               <a:ahLst/>
               <a:cxnLst/>
-              <a:rect r="r" b="b" t="t" l="l"/>
+              <a:rect l="l" t="t" r="r" b="b"/>
               <a:pathLst>
-                <a:path h="571917" w="812800">
+                <a:path w="812800" h="571917">
                   <a:moveTo>
                     <a:pt x="609600" y="0"/>
                   </a:moveTo>
@@ -3449,8 +3472,8 @@
         </p:sp>
         <p:sp>
           <p:nvSpPr>
-            <p:cNvPr name="TextBox 10" id="10"/>
-            <p:cNvSpPr txBox="true"/>
+            <p:cNvPr id="10" name="TextBox 10"/>
+            <p:cNvSpPr txBox="1"/>
             <p:nvPr/>
           </p:nvSpPr>
           <p:spPr>
@@ -3463,7 +3486,7 @@
             </a:prstGeom>
           </p:spPr>
           <p:txBody>
-            <a:bodyPr anchor="ctr" rtlCol="false" tIns="50800" lIns="50800" bIns="50800" rIns="50800"/>
+            <a:bodyPr lIns="50800" tIns="50800" rIns="50800" bIns="50800" rtlCol="0" anchor="ctr"/>
             <a:lstStyle/>
             <a:p>
               <a:pPr algn="ctr">
@@ -3471,18 +3494,19 @@
                   <a:spcPts val="2659"/>
                 </a:lnSpc>
               </a:pPr>
+              <a:endParaRPr/>
             </a:p>
           </p:txBody>
         </p:sp>
       </p:grpSp>
       <p:sp>
         <p:nvSpPr>
-          <p:cNvPr name="TextBox 11" id="11"/>
-          <p:cNvSpPr txBox="true"/>
+          <p:cNvPr id="11" name="TextBox 11"/>
+          <p:cNvSpPr txBox="1"/>
           <p:nvPr/>
         </p:nvSpPr>
         <p:spPr>
-          <a:xfrm rot="0">
+          <a:xfrm>
             <a:off x="3244371" y="5038725"/>
             <a:ext cx="12591216" cy="667519"/>
           </a:xfrm>
@@ -3491,7 +3515,7 @@
           </a:prstGeom>
         </p:spPr>
         <p:txBody>
-          <a:bodyPr anchor="t" rtlCol="false" tIns="0" lIns="0" bIns="0" rIns="0">
+          <a:bodyPr lIns="0" tIns="0" rIns="0" bIns="0" rtlCol="0" anchor="t">
             <a:spAutoFit/>
           </a:bodyPr>
           <a:lstStyle/>
@@ -3505,7 +3529,7 @@
               </a:spcBef>
             </a:pPr>
             <a:r>
-              <a:rPr lang="en-US" b="true" sz="3719">
+              <a:rPr lang="en-US" sz="3719" b="1">
                 <a:solidFill>
                   <a:srgbClr val="303642"/>
                 </a:solidFill>
@@ -3528,7 +3552,7 @@
 </file>
 
 <file path=ppt/slides/slide2.xml><?xml version="1.0" encoding="utf-8"?>
-<p:sld xmlns:p="http://schemas.openxmlformats.org/presentationml/2006/main" xmlns:a="http://schemas.openxmlformats.org/drawingml/2006/main" xmlns:r="http://schemas.openxmlformats.org/officeDocument/2006/relationships">
+<p:sld xmlns:a="http://schemas.openxmlformats.org/drawingml/2006/main" xmlns:r="http://schemas.openxmlformats.org/officeDocument/2006/relationships" xmlns:p="http://schemas.openxmlformats.org/presentationml/2006/main">
   <p:cSld>
     <p:spTree>
       <p:nvGrpSpPr>
@@ -3546,12 +3570,12 @@
       </p:grpSpPr>
       <p:sp>
         <p:nvSpPr>
-          <p:cNvPr name="Freeform 2" id="2"/>
+          <p:cNvPr id="2" name="Freeform 2"/>
           <p:cNvSpPr/>
           <p:nvPr/>
         </p:nvSpPr>
         <p:spPr>
-          <a:xfrm flipH="false" flipV="false" rot="0">
+          <a:xfrm>
             <a:off x="0" y="0"/>
             <a:ext cx="18288000" cy="10287000"/>
           </a:xfrm>
@@ -3560,9 +3584,9 @@
             <a:gdLst/>
             <a:ahLst/>
             <a:cxnLst/>
-            <a:rect r="r" b="b" t="t" l="l"/>
+            <a:rect l="l" t="t" r="r" b="b"/>
             <a:pathLst>
-              <a:path h="10287000" w="18288000">
+              <a:path w="18288000" h="10287000">
                 <a:moveTo>
                   <a:pt x="0" y="0"/>
                 </a:moveTo>
@@ -3585,19 +3609,19 @@
           <a:blipFill>
             <a:blip r:embed="rId2"/>
             <a:stretch>
-              <a:fillRect l="0" t="0" r="0" b="0"/>
+              <a:fillRect/>
             </a:stretch>
           </a:blipFill>
         </p:spPr>
       </p:sp>
       <p:grpSp>
         <p:nvGrpSpPr>
-          <p:cNvPr name="Group 3" id="3"/>
+          <p:cNvPr id="3" name="Group 3"/>
           <p:cNvGrpSpPr/>
           <p:nvPr/>
         </p:nvGrpSpPr>
         <p:grpSpPr>
-          <a:xfrm rot="0">
+          <a:xfrm>
             <a:off x="-970541" y="2006345"/>
             <a:ext cx="1601933" cy="6466659"/>
             <a:chOff x="0" y="0"/>
@@ -3606,12 +3630,12 @@
         </p:grpSpPr>
         <p:sp>
           <p:nvSpPr>
-            <p:cNvPr name="Freeform 4" id="4"/>
+            <p:cNvPr id="4" name="Freeform 4"/>
             <p:cNvSpPr/>
             <p:nvPr/>
           </p:nvSpPr>
           <p:spPr>
-            <a:xfrm flipH="false" flipV="false" rot="0">
+            <a:xfrm>
               <a:off x="0" y="0"/>
               <a:ext cx="421908" cy="1703153"/>
             </a:xfrm>
@@ -3620,9 +3644,9 @@
               <a:gdLst/>
               <a:ahLst/>
               <a:cxnLst/>
-              <a:rect r="r" b="b" t="t" l="l"/>
+              <a:rect l="l" t="t" r="r" b="b"/>
               <a:pathLst>
-                <a:path h="1703153" w="421908">
+                <a:path w="421908" h="1703153">
                   <a:moveTo>
                     <a:pt x="210954" y="0"/>
                   </a:moveTo>
@@ -3689,8 +3713,8 @@
         </p:sp>
         <p:sp>
           <p:nvSpPr>
-            <p:cNvPr name="TextBox 5" id="5"/>
-            <p:cNvSpPr txBox="true"/>
+            <p:cNvPr id="5" name="TextBox 5"/>
+            <p:cNvSpPr txBox="1"/>
             <p:nvPr/>
           </p:nvSpPr>
           <p:spPr>
@@ -3703,7 +3727,7 @@
             </a:prstGeom>
           </p:spPr>
           <p:txBody>
-            <a:bodyPr anchor="ctr" rtlCol="false" tIns="50800" lIns="50800" bIns="50800" rIns="50800"/>
+            <a:bodyPr lIns="50800" tIns="50800" rIns="50800" bIns="50800" rtlCol="0" anchor="ctr"/>
             <a:lstStyle/>
             <a:p>
               <a:pPr algn="ctr">
@@ -3711,18 +3735,19 @@
                   <a:spcPts val="2659"/>
                 </a:lnSpc>
               </a:pPr>
+              <a:endParaRPr/>
             </a:p>
           </p:txBody>
         </p:sp>
       </p:grpSp>
       <p:sp>
         <p:nvSpPr>
-          <p:cNvPr name="TextBox 6" id="6"/>
-          <p:cNvSpPr txBox="true"/>
+          <p:cNvPr id="6" name="TextBox 6"/>
+          <p:cNvSpPr txBox="1"/>
           <p:nvPr/>
         </p:nvSpPr>
         <p:spPr>
-          <a:xfrm rot="0">
+          <a:xfrm>
             <a:off x="4182302" y="1863470"/>
             <a:ext cx="8835484" cy="934732"/>
           </a:xfrm>
@@ -3731,7 +3756,7 @@
           </a:prstGeom>
         </p:spPr>
         <p:txBody>
-          <a:bodyPr anchor="t" rtlCol="false" tIns="0" lIns="0" bIns="0" rIns="0">
+          <a:bodyPr lIns="0" tIns="0" rIns="0" bIns="0" rtlCol="0" anchor="t">
             <a:spAutoFit/>
           </a:bodyPr>
           <a:lstStyle/>
@@ -3745,7 +3770,7 @@
               </a:spcBef>
             </a:pPr>
             <a:r>
-              <a:rPr lang="en-US" b="true" sz="5199">
+              <a:rPr lang="en-US" sz="5199" b="1">
                 <a:solidFill>
                   <a:srgbClr val="000000"/>
                 </a:solidFill>
@@ -3761,12 +3786,12 @@
       </p:sp>
       <p:sp>
         <p:nvSpPr>
-          <p:cNvPr name="TextBox 7" id="7"/>
-          <p:cNvSpPr txBox="true"/>
+          <p:cNvPr id="7" name="TextBox 7"/>
+          <p:cNvSpPr txBox="1"/>
           <p:nvPr/>
         </p:nvSpPr>
         <p:spPr>
-          <a:xfrm rot="0">
+          <a:xfrm>
             <a:off x="1663006" y="3589940"/>
             <a:ext cx="14961988" cy="4883063"/>
           </a:xfrm>
@@ -3775,12 +3800,12 @@
           </a:prstGeom>
         </p:spPr>
         <p:txBody>
-          <a:bodyPr anchor="t" rtlCol="false" tIns="0" lIns="0" bIns="0" rIns="0">
+          <a:bodyPr lIns="0" tIns="0" rIns="0" bIns="0" rtlCol="0" anchor="t">
             <a:spAutoFit/>
           </a:bodyPr>
           <a:lstStyle/>
           <a:p>
-            <a:pPr algn="just" marL="856725" indent="-428363" lvl="1">
+            <a:pPr marL="856725" lvl="1" indent="-428363" algn="just">
               <a:lnSpc>
                 <a:spcPts val="5555"/>
               </a:lnSpc>
@@ -3801,7 +3826,7 @@
             </a:r>
           </a:p>
           <a:p>
-            <a:pPr algn="just" marL="856725" indent="-428363" lvl="1">
+            <a:pPr marL="856725" lvl="1" indent="-428363" algn="just">
               <a:lnSpc>
                 <a:spcPts val="5555"/>
               </a:lnSpc>
@@ -3822,7 +3847,7 @@
             </a:r>
           </a:p>
           <a:p>
-            <a:pPr algn="just" marL="856725" indent="-428363" lvl="1">
+            <a:pPr marL="856725" lvl="1" indent="-428363" algn="just">
               <a:lnSpc>
                 <a:spcPts val="5555"/>
               </a:lnSpc>
@@ -3843,7 +3868,7 @@
             </a:r>
           </a:p>
           <a:p>
-            <a:pPr algn="just" marL="856725" indent="-428363" lvl="1">
+            <a:pPr marL="856725" lvl="1" indent="-428363" algn="just">
               <a:lnSpc>
                 <a:spcPts val="5555"/>
               </a:lnSpc>
@@ -3872,6 +3897,15 @@
                 <a:spcPct val="0"/>
               </a:spcBef>
             </a:pPr>
+            <a:endParaRPr lang="en-US" sz="3968">
+              <a:solidFill>
+                <a:srgbClr val="000000"/>
+              </a:solidFill>
+              <a:latin typeface="Poppins"/>
+              <a:ea typeface="Poppins"/>
+              <a:cs typeface="Poppins"/>
+              <a:sym typeface="Poppins"/>
+            </a:endParaRPr>
           </a:p>
         </p:txBody>
       </p:sp>
@@ -3884,7 +3918,7 @@
 </file>
 
 <file path=ppt/slides/slide3.xml><?xml version="1.0" encoding="utf-8"?>
-<p:sld xmlns:p="http://schemas.openxmlformats.org/presentationml/2006/main" xmlns:a="http://schemas.openxmlformats.org/drawingml/2006/main" xmlns:r="http://schemas.openxmlformats.org/officeDocument/2006/relationships">
+<p:sld xmlns:a="http://schemas.openxmlformats.org/drawingml/2006/main" xmlns:r="http://schemas.openxmlformats.org/officeDocument/2006/relationships" xmlns:p="http://schemas.openxmlformats.org/presentationml/2006/main">
   <p:cSld>
     <p:spTree>
       <p:nvGrpSpPr>
@@ -3902,12 +3936,12 @@
       </p:grpSpPr>
       <p:sp>
         <p:nvSpPr>
-          <p:cNvPr name="Freeform 2" id="2"/>
+          <p:cNvPr id="2" name="Freeform 2"/>
           <p:cNvSpPr/>
           <p:nvPr/>
         </p:nvSpPr>
         <p:spPr>
-          <a:xfrm flipH="false" flipV="false" rot="0">
+          <a:xfrm>
             <a:off x="0" y="0"/>
             <a:ext cx="18288000" cy="10287000"/>
           </a:xfrm>
@@ -3916,9 +3950,9 @@
             <a:gdLst/>
             <a:ahLst/>
             <a:cxnLst/>
-            <a:rect r="r" b="b" t="t" l="l"/>
+            <a:rect l="l" t="t" r="r" b="b"/>
             <a:pathLst>
-              <a:path h="10287000" w="18288000">
+              <a:path w="18288000" h="10287000">
                 <a:moveTo>
                   <a:pt x="0" y="0"/>
                 </a:moveTo>
@@ -3941,19 +3975,19 @@
           <a:blipFill>
             <a:blip r:embed="rId2"/>
             <a:stretch>
-              <a:fillRect l="0" t="0" r="0" b="0"/>
+              <a:fillRect/>
             </a:stretch>
           </a:blipFill>
         </p:spPr>
       </p:sp>
       <p:sp>
         <p:nvSpPr>
-          <p:cNvPr name="TextBox 3" id="3"/>
-          <p:cNvSpPr txBox="true"/>
+          <p:cNvPr id="3" name="TextBox 3"/>
+          <p:cNvSpPr txBox="1"/>
           <p:nvPr/>
         </p:nvSpPr>
         <p:spPr>
-          <a:xfrm rot="0">
+          <a:xfrm>
             <a:off x="4547932" y="1349409"/>
             <a:ext cx="9188001" cy="787040"/>
           </a:xfrm>
@@ -3962,7 +3996,7 @@
           </a:prstGeom>
         </p:spPr>
         <p:txBody>
-          <a:bodyPr anchor="t" rtlCol="false" tIns="0" lIns="0" bIns="0" rIns="0">
+          <a:bodyPr lIns="0" tIns="0" rIns="0" bIns="0" rtlCol="0" anchor="t">
             <a:spAutoFit/>
           </a:bodyPr>
           <a:lstStyle/>
@@ -3973,7 +4007,7 @@
               </a:lnSpc>
             </a:pPr>
             <a:r>
-              <a:rPr lang="en-US" b="true" sz="4639">
+              <a:rPr lang="en-US" sz="4639" b="1">
                 <a:solidFill>
                   <a:srgbClr val="303642"/>
                 </a:solidFill>
@@ -3989,21 +4023,21 @@
       </p:sp>
       <p:sp>
         <p:nvSpPr>
-          <p:cNvPr name="TextBox 4" id="4"/>
-          <p:cNvSpPr txBox="true"/>
+          <p:cNvPr id="4" name="TextBox 4"/>
+          <p:cNvSpPr txBox="1"/>
           <p:nvPr/>
         </p:nvSpPr>
         <p:spPr>
-          <a:xfrm rot="0">
+          <a:xfrm>
             <a:off x="1684264" y="2758864"/>
-            <a:ext cx="14915337" cy="6966966"/>
+            <a:ext cx="14915337" cy="9135065"/>
           </a:xfrm>
           <a:prstGeom prst="rect">
             <a:avLst/>
           </a:prstGeom>
         </p:spPr>
         <p:txBody>
-          <a:bodyPr anchor="t" rtlCol="false" tIns="0" lIns="0" bIns="0" rIns="0">
+          <a:bodyPr lIns="0" tIns="0" rIns="0" bIns="0" rtlCol="0" anchor="t">
             <a:spAutoFit/>
           </a:bodyPr>
           <a:lstStyle/>
@@ -4014,7 +4048,7 @@
               </a:lnSpc>
             </a:pPr>
             <a:r>
-              <a:rPr lang="en-US" sz="3960" b="true">
+              <a:rPr lang="en-US" sz="3960" b="1" dirty="0">
                 <a:solidFill>
                   <a:srgbClr val="303642"/>
                 </a:solidFill>
@@ -4033,7 +4067,7 @@
               </a:lnSpc>
             </a:pPr>
             <a:r>
-              <a:rPr lang="en-US" sz="3960">
+              <a:rPr lang="en-US" sz="3960" dirty="0">
                 <a:solidFill>
                   <a:srgbClr val="303642"/>
                 </a:solidFill>
@@ -4042,7 +4076,7 @@
                 <a:cs typeface="Poppins"/>
                 <a:sym typeface="Poppins"/>
               </a:rPr>
-              <a:t> Predict probability of a county entering IPC Phase 3+ (Crisis or worse) one month ahead.</a:t>
+              <a:t> Predict probability of a county entering IPC Phase 3+ (Crisis or worse)</a:t>
             </a:r>
           </a:p>
           <a:p>
@@ -4051,6 +4085,18 @@
                 <a:spcPts val="5544"/>
               </a:lnSpc>
             </a:pPr>
+            <a:r>
+              <a:rPr lang="en-US" sz="3960" dirty="0">
+                <a:solidFill>
+                  <a:srgbClr val="303642"/>
+                </a:solidFill>
+                <a:latin typeface="Poppins"/>
+                <a:ea typeface="Poppins"/>
+                <a:cs typeface="Poppins"/>
+                <a:sym typeface="Poppins"/>
+              </a:rPr>
+              <a:t> one month ahead.</a:t>
+            </a:r>
           </a:p>
           <a:p>
             <a:pPr algn="l">
@@ -4058,8 +4104,56 @@
                 <a:spcPts val="5544"/>
               </a:lnSpc>
             </a:pPr>
-            <a:r>
-              <a:rPr lang="en-US" sz="3960" b="true">
+            <a:endParaRPr lang="en-US" sz="3960" dirty="0">
+              <a:solidFill>
+                <a:srgbClr val="303642"/>
+              </a:solidFill>
+              <a:latin typeface="Poppins"/>
+              <a:ea typeface="Poppins"/>
+              <a:cs typeface="Poppins"/>
+              <a:sym typeface="Poppins"/>
+            </a:endParaRPr>
+          </a:p>
+          <a:p>
+            <a:pPr algn="l">
+              <a:lnSpc>
+                <a:spcPts val="5544"/>
+              </a:lnSpc>
+            </a:pPr>
+            <a:endParaRPr lang="en-US" sz="3960" dirty="0">
+              <a:solidFill>
+                <a:srgbClr val="303642"/>
+              </a:solidFill>
+              <a:latin typeface="Poppins"/>
+              <a:ea typeface="Poppins"/>
+              <a:cs typeface="Poppins"/>
+              <a:sym typeface="Poppins"/>
+            </a:endParaRPr>
+          </a:p>
+          <a:p>
+            <a:pPr algn="l">
+              <a:lnSpc>
+                <a:spcPts val="5544"/>
+              </a:lnSpc>
+            </a:pPr>
+            <a:endParaRPr lang="en-US" sz="3960" dirty="0">
+              <a:solidFill>
+                <a:srgbClr val="303642"/>
+              </a:solidFill>
+              <a:latin typeface="Poppins"/>
+              <a:ea typeface="Poppins"/>
+              <a:cs typeface="Poppins"/>
+              <a:sym typeface="Poppins"/>
+            </a:endParaRPr>
+          </a:p>
+          <a:p>
+            <a:pPr algn="l">
+              <a:lnSpc>
+                <a:spcPts val="5544"/>
+              </a:lnSpc>
+            </a:pPr>
+            <a:r>
+              <a:rPr lang="en-US" sz="3960" b="1" dirty="0">
                 <a:solidFill>
                   <a:srgbClr val="303642"/>
                 </a:solidFill>
@@ -4072,7 +4166,7 @@
             </a:r>
           </a:p>
           <a:p>
-            <a:pPr algn="l" marL="854966" indent="-427483" lvl="1">
+            <a:pPr marL="854966" lvl="1" indent="-427483" algn="l">
               <a:lnSpc>
                 <a:spcPts val="5544"/>
               </a:lnSpc>
@@ -4080,7 +4174,7 @@
               <a:buChar char="•"/>
             </a:pPr>
             <a:r>
-              <a:rPr lang="en-US" sz="3960">
+              <a:rPr lang="en-US" sz="3960" dirty="0">
                 <a:solidFill>
                   <a:srgbClr val="303642"/>
                 </a:solidFill>
@@ -4093,7 +4187,7 @@
             </a:r>
           </a:p>
           <a:p>
-            <a:pPr algn="l" marL="854966" indent="-427483" lvl="1">
+            <a:pPr marL="854966" lvl="1" indent="-427483" algn="l">
               <a:lnSpc>
                 <a:spcPts val="5544"/>
               </a:lnSpc>
@@ -4101,7 +4195,7 @@
               <a:buChar char="•"/>
             </a:pPr>
             <a:r>
-              <a:rPr lang="en-US" sz="3960">
+              <a:rPr lang="en-US" sz="3960" dirty="0">
                 <a:solidFill>
                   <a:srgbClr val="303642"/>
                 </a:solidFill>
@@ -4114,7 +4208,7 @@
             </a:r>
           </a:p>
           <a:p>
-            <a:pPr algn="l" marL="854966" indent="-427483" lvl="1">
+            <a:pPr marL="854966" lvl="1" indent="-427483" algn="l">
               <a:lnSpc>
                 <a:spcPts val="5544"/>
               </a:lnSpc>
@@ -4122,7 +4216,7 @@
               <a:buChar char="•"/>
             </a:pPr>
             <a:r>
-              <a:rPr lang="en-US" sz="3960">
+              <a:rPr lang="en-US" sz="3960" dirty="0">
                 <a:solidFill>
                   <a:srgbClr val="303642"/>
                 </a:solidFill>
@@ -4135,7 +4229,7 @@
             </a:r>
           </a:p>
           <a:p>
-            <a:pPr algn="l" marL="854966" indent="-427483" lvl="1">
+            <a:pPr marL="854966" lvl="1" indent="-427483" algn="l">
               <a:lnSpc>
                 <a:spcPts val="5544"/>
               </a:lnSpc>
@@ -4143,7 +4237,7 @@
               <a:buChar char="•"/>
             </a:pPr>
             <a:r>
-              <a:rPr lang="en-US" sz="3960">
+              <a:rPr lang="en-US" sz="3960" dirty="0">
                 <a:solidFill>
                   <a:srgbClr val="303642"/>
                 </a:solidFill>
@@ -4164,9 +4258,742 @@
                 <a:spcPct val="0"/>
               </a:spcBef>
             </a:pPr>
-          </a:p>
-        </p:txBody>
-      </p:sp>
+            <a:endParaRPr lang="en-US" sz="3960" dirty="0">
+              <a:solidFill>
+                <a:srgbClr val="303642"/>
+              </a:solidFill>
+              <a:latin typeface="Poppins"/>
+              <a:ea typeface="Poppins"/>
+              <a:cs typeface="Poppins"/>
+              <a:sym typeface="Poppins"/>
+            </a:endParaRPr>
+          </a:p>
+        </p:txBody>
+      </p:sp>
+      <p:graphicFrame>
+        <p:nvGraphicFramePr>
+          <p:cNvPr id="5" name="Table 4">
+            <a:extLst>
+              <a:ext uri="{FF2B5EF4-FFF2-40B4-BE49-F238E27FC236}">
+                <a16:creationId xmlns:a16="http://schemas.microsoft.com/office/drawing/2014/main" id="{8CB737F4-6A5E-21A6-1B62-EB9CDED3B077}"/>
+              </a:ext>
+            </a:extLst>
+          </p:cNvPr>
+          <p:cNvGraphicFramePr>
+            <a:graphicFrameLocks noGrp="1"/>
+          </p:cNvGraphicFramePr>
+          <p:nvPr>
+            <p:extLst>
+              <p:ext uri="{D42A27DB-BD31-4B8C-83A1-F6EECF244321}">
+                <p14:modId xmlns:p14="http://schemas.microsoft.com/office/powerpoint/2010/main" val="2094812921"/>
+              </p:ext>
+            </p:extLst>
+          </p:nvPr>
+        </p:nvGraphicFramePr>
+        <p:xfrm>
+          <a:off x="6934201" y="4381500"/>
+          <a:ext cx="9665400" cy="3962400"/>
+        </p:xfrm>
+        <a:graphic>
+          <a:graphicData uri="http://schemas.openxmlformats.org/drawingml/2006/table">
+            <a:tbl>
+              <a:tblPr/>
+              <a:tblGrid>
+                <a:gridCol w="3221800">
+                  <a:extLst>
+                    <a:ext uri="{9D8B030D-6E8A-4147-A177-3AD203B41FA5}">
+                      <a16:colId xmlns:a16="http://schemas.microsoft.com/office/drawing/2014/main" val="4000144328"/>
+                    </a:ext>
+                  </a:extLst>
+                </a:gridCol>
+                <a:gridCol w="3221800">
+                  <a:extLst>
+                    <a:ext uri="{9D8B030D-6E8A-4147-A177-3AD203B41FA5}">
+                      <a16:colId xmlns:a16="http://schemas.microsoft.com/office/drawing/2014/main" val="477748250"/>
+                    </a:ext>
+                  </a:extLst>
+                </a:gridCol>
+                <a:gridCol w="3221800">
+                  <a:extLst>
+                    <a:ext uri="{9D8B030D-6E8A-4147-A177-3AD203B41FA5}">
+                      <a16:colId xmlns:a16="http://schemas.microsoft.com/office/drawing/2014/main" val="3686289789"/>
+                    </a:ext>
+                  </a:extLst>
+                </a:gridCol>
+              </a:tblGrid>
+              <a:tr h="528320">
+                <a:tc>
+                  <a:txBody>
+                    <a:bodyPr/>
+                    <a:lstStyle/>
+                    <a:p>
+                      <a:pPr fontAlgn="ctr">
+                        <a:buNone/>
+                      </a:pPr>
+                      <a:r>
+                        <a:rPr lang="en-US" b="1" dirty="0">
+                          <a:effectLst/>
+                        </a:rPr>
+                        <a:t>Phase</a:t>
+                      </a:r>
+                    </a:p>
+                  </a:txBody>
+                  <a:tcPr anchor="ctr">
+                    <a:lnL>
+                      <a:noFill/>
+                    </a:lnL>
+                    <a:lnR>
+                      <a:noFill/>
+                    </a:lnR>
+                    <a:lnT>
+                      <a:noFill/>
+                    </a:lnT>
+                    <a:lnB>
+                      <a:noFill/>
+                    </a:lnB>
+                    <a:solidFill>
+                      <a:srgbClr val="FFFFFF"/>
+                    </a:solidFill>
+                  </a:tcPr>
+                </a:tc>
+                <a:tc>
+                  <a:txBody>
+                    <a:bodyPr/>
+                    <a:lstStyle/>
+                    <a:p>
+                      <a:pPr fontAlgn="ctr">
+                        <a:buNone/>
+                      </a:pPr>
+                      <a:r>
+                        <a:rPr lang="en-US" b="1">
+                          <a:effectLst/>
+                        </a:rPr>
+                        <a:t>Classification</a:t>
+                      </a:r>
+                    </a:p>
+                  </a:txBody>
+                  <a:tcPr anchor="ctr">
+                    <a:lnL>
+                      <a:noFill/>
+                    </a:lnL>
+                    <a:lnR>
+                      <a:noFill/>
+                    </a:lnR>
+                    <a:lnT>
+                      <a:noFill/>
+                    </a:lnT>
+                    <a:lnB>
+                      <a:noFill/>
+                    </a:lnB>
+                    <a:solidFill>
+                      <a:srgbClr val="FFFFFF"/>
+                    </a:solidFill>
+                  </a:tcPr>
+                </a:tc>
+                <a:tc>
+                  <a:txBody>
+                    <a:bodyPr/>
+                    <a:lstStyle/>
+                    <a:p>
+                      <a:pPr fontAlgn="ctr">
+                        <a:buNone/>
+                      </a:pPr>
+                      <a:r>
+                        <a:rPr lang="en-US" b="1">
+                          <a:effectLst/>
+                        </a:rPr>
+                        <a:t>Meaning</a:t>
+                      </a:r>
+                    </a:p>
+                  </a:txBody>
+                  <a:tcPr anchor="ctr">
+                    <a:lnL>
+                      <a:noFill/>
+                    </a:lnL>
+                    <a:lnR>
+                      <a:noFill/>
+                    </a:lnR>
+                    <a:lnT>
+                      <a:noFill/>
+                    </a:lnT>
+                    <a:lnB>
+                      <a:noFill/>
+                    </a:lnB>
+                    <a:solidFill>
+                      <a:srgbClr val="FFFFFF"/>
+                    </a:solidFill>
+                  </a:tcPr>
+                </a:tc>
+                <a:extLst>
+                  <a:ext uri="{0D108BD9-81ED-4DB2-BD59-A6C34878D82A}">
+                    <a16:rowId xmlns:a16="http://schemas.microsoft.com/office/drawing/2014/main" val="2865383920"/>
+                  </a:ext>
+                </a:extLst>
+              </a:tr>
+              <a:tr h="528320">
+                <a:tc>
+                  <a:txBody>
+                    <a:bodyPr/>
+                    <a:lstStyle/>
+                    <a:p>
+                      <a:pPr fontAlgn="ctr">
+                        <a:buNone/>
+                      </a:pPr>
+                      <a:r>
+                        <a:rPr lang="en-US">
+                          <a:effectLst/>
+                        </a:rPr>
+                        <a:t>1</a:t>
+                      </a:r>
+                    </a:p>
+                  </a:txBody>
+                  <a:tcPr anchor="ctr">
+                    <a:lnL>
+                      <a:noFill/>
+                    </a:lnL>
+                    <a:lnR>
+                      <a:noFill/>
+                    </a:lnR>
+                    <a:lnT>
+                      <a:noFill/>
+                    </a:lnT>
+                    <a:lnB>
+                      <a:noFill/>
+                    </a:lnB>
+                    <a:solidFill>
+                      <a:srgbClr val="FFFFFF"/>
+                    </a:solidFill>
+                  </a:tcPr>
+                </a:tc>
+                <a:tc>
+                  <a:txBody>
+                    <a:bodyPr/>
+                    <a:lstStyle/>
+                    <a:p>
+                      <a:pPr fontAlgn="ctr">
+                        <a:buNone/>
+                      </a:pPr>
+                      <a:r>
+                        <a:rPr lang="en-US" b="1">
+                          <a:effectLst/>
+                        </a:rPr>
+                        <a:t>Minimal</a:t>
+                      </a:r>
+                      <a:endParaRPr lang="en-US">
+                        <a:effectLst/>
+                      </a:endParaRPr>
+                    </a:p>
+                  </a:txBody>
+                  <a:tcPr anchor="ctr">
+                    <a:lnL>
+                      <a:noFill/>
+                    </a:lnL>
+                    <a:lnR>
+                      <a:noFill/>
+                    </a:lnR>
+                    <a:lnT>
+                      <a:noFill/>
+                    </a:lnT>
+                    <a:lnB>
+                      <a:noFill/>
+                    </a:lnB>
+                    <a:solidFill>
+                      <a:srgbClr val="FFFFFF"/>
+                    </a:solidFill>
+                  </a:tcPr>
+                </a:tc>
+                <a:tc>
+                  <a:txBody>
+                    <a:bodyPr/>
+                    <a:lstStyle/>
+                    <a:p>
+                      <a:pPr fontAlgn="ctr">
+                        <a:buNone/>
+                      </a:pPr>
+                      <a:r>
+                        <a:rPr lang="en-US">
+                          <a:effectLst/>
+                        </a:rPr>
+                        <a:t>Food needs are met</a:t>
+                      </a:r>
+                    </a:p>
+                  </a:txBody>
+                  <a:tcPr anchor="ctr">
+                    <a:lnL>
+                      <a:noFill/>
+                    </a:lnL>
+                    <a:lnR>
+                      <a:noFill/>
+                    </a:lnR>
+                    <a:lnT>
+                      <a:noFill/>
+                    </a:lnT>
+                    <a:lnB>
+                      <a:noFill/>
+                    </a:lnB>
+                    <a:solidFill>
+                      <a:srgbClr val="FFFFFF"/>
+                    </a:solidFill>
+                  </a:tcPr>
+                </a:tc>
+                <a:extLst>
+                  <a:ext uri="{0D108BD9-81ED-4DB2-BD59-A6C34878D82A}">
+                    <a16:rowId xmlns:a16="http://schemas.microsoft.com/office/drawing/2014/main" val="5322990"/>
+                  </a:ext>
+                </a:extLst>
+              </a:tr>
+              <a:tr h="924560">
+                <a:tc>
+                  <a:txBody>
+                    <a:bodyPr/>
+                    <a:lstStyle/>
+                    <a:p>
+                      <a:pPr fontAlgn="ctr">
+                        <a:buNone/>
+                      </a:pPr>
+                      <a:r>
+                        <a:rPr lang="en-US">
+                          <a:effectLst/>
+                        </a:rPr>
+                        <a:t>2</a:t>
+                      </a:r>
+                    </a:p>
+                  </a:txBody>
+                  <a:tcPr anchor="ctr">
+                    <a:lnL>
+                      <a:noFill/>
+                    </a:lnL>
+                    <a:lnR>
+                      <a:noFill/>
+                    </a:lnR>
+                    <a:lnT>
+                      <a:noFill/>
+                    </a:lnT>
+                    <a:lnB>
+                      <a:noFill/>
+                    </a:lnB>
+                    <a:solidFill>
+                      <a:srgbClr val="FFFFFF"/>
+                    </a:solidFill>
+                  </a:tcPr>
+                </a:tc>
+                <a:tc>
+                  <a:txBody>
+                    <a:bodyPr/>
+                    <a:lstStyle/>
+                    <a:p>
+                      <a:pPr fontAlgn="ctr">
+                        <a:buNone/>
+                      </a:pPr>
+                      <a:r>
+                        <a:rPr lang="en-US" b="1" dirty="0">
+                          <a:effectLst/>
+                        </a:rPr>
+                        <a:t>Stressed</a:t>
+                      </a:r>
+                      <a:endParaRPr lang="en-US" dirty="0">
+                        <a:effectLst/>
+                      </a:endParaRPr>
+                    </a:p>
+                  </a:txBody>
+                  <a:tcPr anchor="ctr">
+                    <a:lnL>
+                      <a:noFill/>
+                    </a:lnL>
+                    <a:lnR>
+                      <a:noFill/>
+                    </a:lnR>
+                    <a:lnT>
+                      <a:noFill/>
+                    </a:lnT>
+                    <a:lnB>
+                      <a:noFill/>
+                    </a:lnB>
+                    <a:solidFill>
+                      <a:srgbClr val="FFFFFF"/>
+                    </a:solidFill>
+                  </a:tcPr>
+                </a:tc>
+                <a:tc>
+                  <a:txBody>
+                    <a:bodyPr/>
+                    <a:lstStyle/>
+                    <a:p>
+                      <a:pPr fontAlgn="ctr">
+                        <a:buNone/>
+                      </a:pPr>
+                      <a:r>
+                        <a:rPr lang="en-US">
+                          <a:effectLst/>
+                        </a:rPr>
+                        <a:t>Households meet minimum needs but face stress</a:t>
+                      </a:r>
+                    </a:p>
+                  </a:txBody>
+                  <a:tcPr anchor="ctr">
+                    <a:lnL>
+                      <a:noFill/>
+                    </a:lnL>
+                    <a:lnR>
+                      <a:noFill/>
+                    </a:lnR>
+                    <a:lnT>
+                      <a:noFill/>
+                    </a:lnT>
+                    <a:lnB>
+                      <a:noFill/>
+                    </a:lnB>
+                    <a:solidFill>
+                      <a:srgbClr val="FFFFFF"/>
+                    </a:solidFill>
+                  </a:tcPr>
+                </a:tc>
+                <a:extLst>
+                  <a:ext uri="{0D108BD9-81ED-4DB2-BD59-A6C34878D82A}">
+                    <a16:rowId xmlns:a16="http://schemas.microsoft.com/office/drawing/2014/main" val="1103597976"/>
+                  </a:ext>
+                </a:extLst>
+              </a:tr>
+              <a:tr h="528320">
+                <a:tc>
+                  <a:txBody>
+                    <a:bodyPr/>
+                    <a:lstStyle/>
+                    <a:p>
+                      <a:pPr fontAlgn="ctr">
+                        <a:buNone/>
+                      </a:pPr>
+                      <a:r>
+                        <a:rPr lang="en-US">
+                          <a:effectLst/>
+                        </a:rPr>
+                        <a:t>3</a:t>
+                      </a:r>
+                    </a:p>
+                  </a:txBody>
+                  <a:tcPr anchor="ctr">
+                    <a:lnL>
+                      <a:noFill/>
+                    </a:lnL>
+                    <a:lnR>
+                      <a:noFill/>
+                    </a:lnR>
+                    <a:lnT>
+                      <a:noFill/>
+                    </a:lnT>
+                    <a:lnB>
+                      <a:noFill/>
+                    </a:lnB>
+                    <a:solidFill>
+                      <a:srgbClr val="FFFFFF"/>
+                    </a:solidFill>
+                  </a:tcPr>
+                </a:tc>
+                <a:tc>
+                  <a:txBody>
+                    <a:bodyPr/>
+                    <a:lstStyle/>
+                    <a:p>
+                      <a:pPr fontAlgn="ctr">
+                        <a:buNone/>
+                      </a:pPr>
+                      <a:r>
+                        <a:rPr lang="en-US" b="1" dirty="0">
+                          <a:effectLst/>
+                        </a:rPr>
+                        <a:t>Crisis</a:t>
+                      </a:r>
+                      <a:endParaRPr lang="en-US" dirty="0">
+                        <a:effectLst/>
+                      </a:endParaRPr>
+                    </a:p>
+                  </a:txBody>
+                  <a:tcPr anchor="ctr">
+                    <a:lnL>
+                      <a:noFill/>
+                    </a:lnL>
+                    <a:lnR>
+                      <a:noFill/>
+                    </a:lnR>
+                    <a:lnT>
+                      <a:noFill/>
+                    </a:lnT>
+                    <a:lnB>
+                      <a:noFill/>
+                    </a:lnB>
+                    <a:solidFill>
+                      <a:srgbClr val="FFFFFF"/>
+                    </a:solidFill>
+                  </a:tcPr>
+                </a:tc>
+                <a:tc>
+                  <a:txBody>
+                    <a:bodyPr/>
+                    <a:lstStyle/>
+                    <a:p>
+                      <a:pPr fontAlgn="ctr">
+                        <a:buNone/>
+                      </a:pPr>
+                      <a:r>
+                        <a:rPr lang="en-US">
+                          <a:effectLst/>
+                        </a:rPr>
+                        <a:t>Urgent assistance required</a:t>
+                      </a:r>
+                    </a:p>
+                  </a:txBody>
+                  <a:tcPr anchor="ctr">
+                    <a:lnL>
+                      <a:noFill/>
+                    </a:lnL>
+                    <a:lnR>
+                      <a:noFill/>
+                    </a:lnR>
+                    <a:lnT>
+                      <a:noFill/>
+                    </a:lnT>
+                    <a:lnB>
+                      <a:noFill/>
+                    </a:lnB>
+                    <a:solidFill>
+                      <a:srgbClr val="FFFFFF"/>
+                    </a:solidFill>
+                  </a:tcPr>
+                </a:tc>
+                <a:extLst>
+                  <a:ext uri="{0D108BD9-81ED-4DB2-BD59-A6C34878D82A}">
+                    <a16:rowId xmlns:a16="http://schemas.microsoft.com/office/drawing/2014/main" val="2898596025"/>
+                  </a:ext>
+                </a:extLst>
+              </a:tr>
+              <a:tr h="528320">
+                <a:tc>
+                  <a:txBody>
+                    <a:bodyPr/>
+                    <a:lstStyle/>
+                    <a:p>
+                      <a:pPr fontAlgn="ctr">
+                        <a:buNone/>
+                      </a:pPr>
+                      <a:r>
+                        <a:rPr lang="en-US">
+                          <a:effectLst/>
+                        </a:rPr>
+                        <a:t>4</a:t>
+                      </a:r>
+                    </a:p>
+                  </a:txBody>
+                  <a:tcPr anchor="ctr">
+                    <a:lnL>
+                      <a:noFill/>
+                    </a:lnL>
+                    <a:lnR>
+                      <a:noFill/>
+                    </a:lnR>
+                    <a:lnT>
+                      <a:noFill/>
+                    </a:lnT>
+                    <a:lnB>
+                      <a:noFill/>
+                    </a:lnB>
+                    <a:solidFill>
+                      <a:srgbClr val="FFFFFF"/>
+                    </a:solidFill>
+                  </a:tcPr>
+                </a:tc>
+                <a:tc>
+                  <a:txBody>
+                    <a:bodyPr/>
+                    <a:lstStyle/>
+                    <a:p>
+                      <a:pPr fontAlgn="ctr">
+                        <a:buNone/>
+                      </a:pPr>
+                      <a:r>
+                        <a:rPr lang="en-US" b="1">
+                          <a:effectLst/>
+                        </a:rPr>
+                        <a:t>Emergency</a:t>
+                      </a:r>
+                      <a:endParaRPr lang="en-US">
+                        <a:effectLst/>
+                      </a:endParaRPr>
+                    </a:p>
+                  </a:txBody>
+                  <a:tcPr anchor="ctr">
+                    <a:lnL>
+                      <a:noFill/>
+                    </a:lnL>
+                    <a:lnR>
+                      <a:noFill/>
+                    </a:lnR>
+                    <a:lnT>
+                      <a:noFill/>
+                    </a:lnT>
+                    <a:lnB>
+                      <a:noFill/>
+                    </a:lnB>
+                    <a:solidFill>
+                      <a:srgbClr val="FFFFFF"/>
+                    </a:solidFill>
+                  </a:tcPr>
+                </a:tc>
+                <a:tc>
+                  <a:txBody>
+                    <a:bodyPr/>
+                    <a:lstStyle/>
+                    <a:p>
+                      <a:pPr fontAlgn="ctr">
+                        <a:buNone/>
+                      </a:pPr>
+                      <a:r>
+                        <a:rPr lang="en-US" dirty="0">
+                          <a:effectLst/>
+                        </a:rPr>
+                        <a:t>Severe food consumption gaps</a:t>
+                      </a:r>
+                    </a:p>
+                  </a:txBody>
+                  <a:tcPr anchor="ctr">
+                    <a:lnL>
+                      <a:noFill/>
+                    </a:lnL>
+                    <a:lnR>
+                      <a:noFill/>
+                    </a:lnR>
+                    <a:lnT>
+                      <a:noFill/>
+                    </a:lnT>
+                    <a:lnB>
+                      <a:noFill/>
+                    </a:lnB>
+                    <a:solidFill>
+                      <a:srgbClr val="FFFFFF"/>
+                    </a:solidFill>
+                  </a:tcPr>
+                </a:tc>
+                <a:extLst>
+                  <a:ext uri="{0D108BD9-81ED-4DB2-BD59-A6C34878D82A}">
+                    <a16:rowId xmlns:a16="http://schemas.microsoft.com/office/drawing/2014/main" val="3198131586"/>
+                  </a:ext>
+                </a:extLst>
+              </a:tr>
+              <a:tr h="924560">
+                <a:tc>
+                  <a:txBody>
+                    <a:bodyPr/>
+                    <a:lstStyle/>
+                    <a:p>
+                      <a:pPr fontAlgn="ctr">
+                        <a:buNone/>
+                      </a:pPr>
+                      <a:r>
+                        <a:rPr lang="en-US">
+                          <a:effectLst/>
+                        </a:rPr>
+                        <a:t>5</a:t>
+                      </a:r>
+                    </a:p>
+                  </a:txBody>
+                  <a:tcPr anchor="ctr">
+                    <a:lnL>
+                      <a:noFill/>
+                    </a:lnL>
+                    <a:lnR>
+                      <a:noFill/>
+                    </a:lnR>
+                    <a:lnT>
+                      <a:noFill/>
+                    </a:lnT>
+                    <a:lnB>
+                      <a:noFill/>
+                    </a:lnB>
+                    <a:solidFill>
+                      <a:srgbClr val="FFFFFF"/>
+                    </a:solidFill>
+                  </a:tcPr>
+                </a:tc>
+                <a:tc>
+                  <a:txBody>
+                    <a:bodyPr/>
+                    <a:lstStyle/>
+                    <a:p>
+                      <a:pPr fontAlgn="ctr">
+                        <a:buNone/>
+                      </a:pPr>
+                      <a:r>
+                        <a:rPr lang="en-US" b="1">
+                          <a:effectLst/>
+                        </a:rPr>
+                        <a:t>Famine</a:t>
+                      </a:r>
+                      <a:endParaRPr lang="en-US">
+                        <a:effectLst/>
+                      </a:endParaRPr>
+                    </a:p>
+                  </a:txBody>
+                  <a:tcPr anchor="ctr">
+                    <a:lnL>
+                      <a:noFill/>
+                    </a:lnL>
+                    <a:lnR>
+                      <a:noFill/>
+                    </a:lnR>
+                    <a:lnT>
+                      <a:noFill/>
+                    </a:lnT>
+                    <a:lnB>
+                      <a:noFill/>
+                    </a:lnB>
+                    <a:solidFill>
+                      <a:srgbClr val="FFFFFF"/>
+                    </a:solidFill>
+                  </a:tcPr>
+                </a:tc>
+                <a:tc>
+                  <a:txBody>
+                    <a:bodyPr/>
+                    <a:lstStyle/>
+                    <a:p>
+                      <a:pPr fontAlgn="ctr">
+                        <a:buNone/>
+                      </a:pPr>
+                      <a:r>
+                        <a:rPr lang="en-US" dirty="0">
+                          <a:effectLst/>
+                        </a:rPr>
+                        <a:t>Extreme starvation and mortality risk</a:t>
+                      </a:r>
+                    </a:p>
+                  </a:txBody>
+                  <a:tcPr anchor="ctr">
+                    <a:lnL>
+                      <a:noFill/>
+                    </a:lnL>
+                    <a:lnR>
+                      <a:noFill/>
+                    </a:lnR>
+                    <a:lnT>
+                      <a:noFill/>
+                    </a:lnT>
+                    <a:lnB>
+                      <a:noFill/>
+                    </a:lnB>
+                    <a:solidFill>
+                      <a:srgbClr val="FFFFFF"/>
+                    </a:solidFill>
+                  </a:tcPr>
+                </a:tc>
+                <a:extLst>
+                  <a:ext uri="{0D108BD9-81ED-4DB2-BD59-A6C34878D82A}">
+                    <a16:rowId xmlns:a16="http://schemas.microsoft.com/office/drawing/2014/main" val="84072062"/>
+                  </a:ext>
+                </a:extLst>
+              </a:tr>
+            </a:tbl>
+          </a:graphicData>
+        </a:graphic>
+      </p:graphicFrame>
     </p:spTree>
   </p:cSld>
   <p:clrMapOvr>
@@ -4176,7 +5003,7 @@
 </file>
 
 <file path=ppt/slides/slide4.xml><?xml version="1.0" encoding="utf-8"?>
-<p:sld xmlns:p="http://schemas.openxmlformats.org/presentationml/2006/main" xmlns:a="http://schemas.openxmlformats.org/drawingml/2006/main" xmlns:r="http://schemas.openxmlformats.org/officeDocument/2006/relationships">
+<p:sld xmlns:a="http://schemas.openxmlformats.org/drawingml/2006/main" xmlns:r="http://schemas.openxmlformats.org/officeDocument/2006/relationships" xmlns:p="http://schemas.openxmlformats.org/presentationml/2006/main">
   <p:cSld>
     <p:spTree>
       <p:nvGrpSpPr>
@@ -4194,12 +5021,12 @@
       </p:grpSpPr>
       <p:sp>
         <p:nvSpPr>
-          <p:cNvPr name="Freeform 2" id="2"/>
+          <p:cNvPr id="2" name="Freeform 2"/>
           <p:cNvSpPr/>
           <p:nvPr/>
         </p:nvSpPr>
         <p:spPr>
-          <a:xfrm flipH="false" flipV="false" rot="0">
+          <a:xfrm>
             <a:off x="0" y="0"/>
             <a:ext cx="18288000" cy="10287000"/>
           </a:xfrm>
@@ -4208,9 +5035,9 @@
             <a:gdLst/>
             <a:ahLst/>
             <a:cxnLst/>
-            <a:rect r="r" b="b" t="t" l="l"/>
+            <a:rect l="l" t="t" r="r" b="b"/>
             <a:pathLst>
-              <a:path h="10287000" w="18288000">
+              <a:path w="18288000" h="10287000">
                 <a:moveTo>
                   <a:pt x="0" y="0"/>
                 </a:moveTo>
@@ -4233,19 +5060,19 @@
           <a:blipFill>
             <a:blip r:embed="rId2"/>
             <a:stretch>
-              <a:fillRect l="0" t="0" r="0" b="0"/>
+              <a:fillRect/>
             </a:stretch>
           </a:blipFill>
         </p:spPr>
       </p:sp>
       <p:grpSp>
         <p:nvGrpSpPr>
-          <p:cNvPr name="Group 3" id="3"/>
+          <p:cNvPr id="3" name="Group 3"/>
           <p:cNvGrpSpPr/>
           <p:nvPr/>
         </p:nvGrpSpPr>
         <p:grpSpPr>
-          <a:xfrm rot="0">
+          <a:xfrm>
             <a:off x="1028700" y="8997950"/>
             <a:ext cx="2514600" cy="260350"/>
             <a:chOff x="0" y="0"/>
@@ -4254,12 +5081,12 @@
         </p:grpSpPr>
         <p:sp>
           <p:nvSpPr>
-            <p:cNvPr name="Freeform 4" id="4"/>
+            <p:cNvPr id="4" name="Freeform 4"/>
             <p:cNvSpPr/>
             <p:nvPr/>
           </p:nvSpPr>
           <p:spPr>
-            <a:xfrm flipH="false" flipV="false" rot="0">
+            <a:xfrm>
               <a:off x="0" y="0"/>
               <a:ext cx="662281" cy="68570"/>
             </a:xfrm>
@@ -4268,9 +5095,9 @@
               <a:gdLst/>
               <a:ahLst/>
               <a:cxnLst/>
-              <a:rect r="r" b="b" t="t" l="l"/>
+              <a:rect l="l" t="t" r="r" b="b"/>
               <a:pathLst>
-                <a:path h="68570" w="662281">
+                <a:path w="662281" h="68570">
                   <a:moveTo>
                     <a:pt x="0" y="0"/>
                   </a:moveTo>
@@ -4294,8 +5121,8 @@
         </p:sp>
         <p:sp>
           <p:nvSpPr>
-            <p:cNvPr name="TextBox 5" id="5"/>
-            <p:cNvSpPr txBox="true"/>
+            <p:cNvPr id="5" name="TextBox 5"/>
+            <p:cNvSpPr txBox="1"/>
             <p:nvPr/>
           </p:nvSpPr>
           <p:spPr>
@@ -4308,7 +5135,7 @@
             </a:prstGeom>
           </p:spPr>
           <p:txBody>
-            <a:bodyPr anchor="ctr" rtlCol="false" tIns="50800" lIns="50800" bIns="50800" rIns="50800"/>
+            <a:bodyPr lIns="50800" tIns="50800" rIns="50800" bIns="50800" rtlCol="0" anchor="ctr"/>
             <a:lstStyle/>
             <a:p>
               <a:pPr algn="ctr">
@@ -4316,20 +5143,21 @@
                   <a:spcPts val="2659"/>
                 </a:lnSpc>
               </a:pPr>
+              <a:endParaRPr/>
             </a:p>
           </p:txBody>
         </p:sp>
       </p:grpSp>
       <p:grpSp>
         <p:nvGrpSpPr>
-          <p:cNvPr name="Group 6" id="6"/>
+          <p:cNvPr id="6" name="Group 6"/>
           <p:cNvGrpSpPr>
-            <a:grpSpLocks noChangeAspect="true"/>
+            <a:grpSpLocks noChangeAspect="1"/>
           </p:cNvGrpSpPr>
           <p:nvPr/>
         </p:nvGrpSpPr>
         <p:grpSpPr>
-          <a:xfrm rot="0">
+          <a:xfrm>
             <a:off x="7416165" y="429700"/>
             <a:ext cx="5246370" cy="5246370"/>
             <a:chOff x="0" y="0"/>
@@ -4338,12 +5166,12 @@
         </p:grpSpPr>
         <p:sp>
           <p:nvSpPr>
-            <p:cNvPr name="Freeform 7" id="7"/>
+            <p:cNvPr id="7" name="Freeform 7"/>
             <p:cNvSpPr/>
             <p:nvPr/>
           </p:nvSpPr>
           <p:spPr>
-            <a:xfrm flipH="false" flipV="false" rot="0">
+            <a:xfrm>
               <a:off x="0" y="0"/>
               <a:ext cx="6350000" cy="6350000"/>
             </a:xfrm>
@@ -4352,9 +5180,9 @@
               <a:gdLst/>
               <a:ahLst/>
               <a:cxnLst/>
-              <a:rect r="r" b="b" t="t" l="l"/>
+              <a:rect l="l" t="t" r="r" b="b"/>
               <a:pathLst>
-                <a:path h="6350000" w="6350000">
+                <a:path w="6350000" h="6350000">
                   <a:moveTo>
                     <a:pt x="0" y="3175000"/>
                   </a:moveTo>
@@ -4390,12 +5218,12 @@
         </p:sp>
         <p:sp>
           <p:nvSpPr>
-            <p:cNvPr name="Freeform 8" id="8"/>
+            <p:cNvPr id="8" name="Freeform 8"/>
             <p:cNvSpPr/>
             <p:nvPr/>
           </p:nvSpPr>
           <p:spPr>
-            <a:xfrm flipH="false" flipV="false" rot="0">
+            <a:xfrm>
               <a:off x="391160" y="364490"/>
               <a:ext cx="5619750" cy="5621020"/>
             </a:xfrm>
@@ -4404,9 +5232,9 @@
               <a:gdLst/>
               <a:ahLst/>
               <a:cxnLst/>
-              <a:rect r="r" b="b" t="t" l="l"/>
+              <a:rect l="l" t="t" r="r" b="b"/>
               <a:pathLst>
-                <a:path h="5621020" w="5619750">
+                <a:path w="5619750" h="5621020">
                   <a:moveTo>
                     <a:pt x="2810510" y="0"/>
                   </a:moveTo>
@@ -4437,7 +5265,7 @@
             <a:blipFill>
               <a:blip r:embed="rId3"/>
               <a:stretch>
-                <a:fillRect l="0" t="-1168" r="0" b="-1168"/>
+                <a:fillRect t="-1168" b="-1168"/>
               </a:stretch>
             </a:blipFill>
           </p:spPr>
@@ -4445,12 +5273,12 @@
       </p:grpSp>
       <p:sp>
         <p:nvSpPr>
-          <p:cNvPr name="Freeform 9" id="9"/>
+          <p:cNvPr id="9" name="Freeform 9"/>
           <p:cNvSpPr/>
           <p:nvPr/>
         </p:nvSpPr>
         <p:spPr>
-          <a:xfrm flipH="false" flipV="false" rot="0">
+          <a:xfrm>
             <a:off x="13489237" y="3426906"/>
             <a:ext cx="3018207" cy="5264713"/>
           </a:xfrm>
@@ -4459,9 +5287,9 @@
             <a:gdLst/>
             <a:ahLst/>
             <a:cxnLst/>
-            <a:rect r="r" b="b" t="t" l="l"/>
+            <a:rect l="l" t="t" r="r" b="b"/>
             <a:pathLst>
-              <a:path h="5264713" w="3018207">
+              <a:path w="3018207" h="5264713">
                 <a:moveTo>
                   <a:pt x="0" y="0"/>
                 </a:moveTo>
@@ -4484,19 +5312,19 @@
           <a:blipFill>
             <a:blip r:embed="rId4"/>
             <a:stretch>
-              <a:fillRect l="0" t="0" r="0" b="0"/>
+              <a:fillRect/>
             </a:stretch>
           </a:blipFill>
         </p:spPr>
       </p:sp>
       <p:sp>
         <p:nvSpPr>
-          <p:cNvPr name="TextBox 10" id="10"/>
-          <p:cNvSpPr txBox="true"/>
+          <p:cNvPr id="10" name="TextBox 10"/>
+          <p:cNvSpPr txBox="1"/>
           <p:nvPr/>
         </p:nvSpPr>
         <p:spPr>
-          <a:xfrm rot="0">
+          <a:xfrm>
             <a:off x="1299046" y="1897027"/>
             <a:ext cx="4967983" cy="913758"/>
           </a:xfrm>
@@ -4505,7 +5333,7 @@
           </a:prstGeom>
         </p:spPr>
         <p:txBody>
-          <a:bodyPr anchor="t" rtlCol="false" tIns="0" lIns="0" bIns="0" rIns="0">
+          <a:bodyPr lIns="0" tIns="0" rIns="0" bIns="0" rtlCol="0" anchor="t">
             <a:spAutoFit/>
           </a:bodyPr>
           <a:lstStyle/>
@@ -4516,7 +5344,7 @@
               </a:lnSpc>
             </a:pPr>
             <a:r>
-              <a:rPr lang="en-US" b="true" sz="5275">
+              <a:rPr lang="en-US" sz="5275" b="1">
                 <a:solidFill>
                   <a:srgbClr val="000000"/>
                 </a:solidFill>
@@ -4532,12 +5360,12 @@
       </p:sp>
       <p:sp>
         <p:nvSpPr>
-          <p:cNvPr name="TextBox 11" id="11"/>
-          <p:cNvSpPr txBox="true"/>
+          <p:cNvPr id="11" name="TextBox 11"/>
+          <p:cNvSpPr txBox="1"/>
           <p:nvPr/>
         </p:nvSpPr>
         <p:spPr>
-          <a:xfrm rot="0">
+          <a:xfrm>
             <a:off x="1028700" y="3652129"/>
             <a:ext cx="7065166" cy="5349475"/>
           </a:xfrm>
@@ -4546,7 +5374,7 @@
           </a:prstGeom>
         </p:spPr>
         <p:txBody>
-          <a:bodyPr anchor="t" rtlCol="false" tIns="0" lIns="0" bIns="0" rIns="0">
+          <a:bodyPr lIns="0" tIns="0" rIns="0" bIns="0" rtlCol="0" anchor="t">
             <a:spAutoFit/>
           </a:bodyPr>
           <a:lstStyle/>
@@ -4557,7 +5385,7 @@
               </a:lnSpc>
             </a:pPr>
             <a:r>
-              <a:rPr lang="en-US" sz="2765" b="true">
+              <a:rPr lang="en-US" sz="2765" b="1">
                 <a:solidFill>
                   <a:srgbClr val="000000"/>
                 </a:solidFill>
@@ -4570,7 +5398,7 @@
             </a:r>
           </a:p>
           <a:p>
-            <a:pPr algn="l" marL="597124" indent="-298562" lvl="1">
+            <a:pPr marL="597124" lvl="1" indent="-298562" algn="l">
               <a:lnSpc>
                 <a:spcPts val="3872"/>
               </a:lnSpc>
@@ -4596,6 +5424,15 @@
                 <a:spcPts val="3872"/>
               </a:lnSpc>
             </a:pPr>
+            <a:endParaRPr lang="en-US" sz="2765">
+              <a:solidFill>
+                <a:srgbClr val="000000"/>
+              </a:solidFill>
+              <a:latin typeface="Poppins"/>
+              <a:ea typeface="Poppins"/>
+              <a:cs typeface="Poppins"/>
+              <a:sym typeface="Poppins"/>
+            </a:endParaRPr>
           </a:p>
           <a:p>
             <a:pPr algn="l">
@@ -4604,7 +5441,7 @@
               </a:lnSpc>
             </a:pPr>
             <a:r>
-              <a:rPr lang="en-US" sz="2765" b="true">
+              <a:rPr lang="en-US" sz="2765" b="1">
                 <a:solidFill>
                   <a:srgbClr val="000000"/>
                 </a:solidFill>
@@ -4617,7 +5454,7 @@
             </a:r>
           </a:p>
           <a:p>
-            <a:pPr algn="l" marL="597124" indent="-298562" lvl="1">
+            <a:pPr marL="597124" lvl="1" indent="-298562" algn="l">
               <a:lnSpc>
                 <a:spcPts val="3872"/>
               </a:lnSpc>
@@ -4638,7 +5475,7 @@
             </a:r>
           </a:p>
           <a:p>
-            <a:pPr algn="l" marL="597124" indent="-298562" lvl="1">
+            <a:pPr marL="597124" lvl="1" indent="-298562" algn="l">
               <a:lnSpc>
                 <a:spcPts val="3872"/>
               </a:lnSpc>
@@ -4659,7 +5496,7 @@
             </a:r>
           </a:p>
           <a:p>
-            <a:pPr algn="l" marL="597124" indent="-298562" lvl="1">
+            <a:pPr marL="597124" lvl="1" indent="-298562" algn="l">
               <a:lnSpc>
                 <a:spcPts val="3872"/>
               </a:lnSpc>
@@ -4680,7 +5517,7 @@
             </a:r>
           </a:p>
           <a:p>
-            <a:pPr algn="l" marL="597124" indent="-298562" lvl="1">
+            <a:pPr marL="597124" lvl="1" indent="-298562" algn="l">
               <a:lnSpc>
                 <a:spcPts val="3872"/>
               </a:lnSpc>
@@ -4709,6 +5546,15 @@
                 <a:spcPct val="0"/>
               </a:spcBef>
             </a:pPr>
+            <a:endParaRPr lang="en-US" sz="2765">
+              <a:solidFill>
+                <a:srgbClr val="000000"/>
+              </a:solidFill>
+              <a:latin typeface="Poppins"/>
+              <a:ea typeface="Poppins"/>
+              <a:cs typeface="Poppins"/>
+              <a:sym typeface="Poppins"/>
+            </a:endParaRPr>
           </a:p>
         </p:txBody>
       </p:sp>
@@ -4721,7 +5567,7 @@
 </file>
 
 <file path=ppt/slides/slide5.xml><?xml version="1.0" encoding="utf-8"?>
-<p:sld xmlns:p="http://schemas.openxmlformats.org/presentationml/2006/main" xmlns:a="http://schemas.openxmlformats.org/drawingml/2006/main" xmlns:r="http://schemas.openxmlformats.org/officeDocument/2006/relationships">
+<p:sld xmlns:a="http://schemas.openxmlformats.org/drawingml/2006/main" xmlns:r="http://schemas.openxmlformats.org/officeDocument/2006/relationships" xmlns:p="http://schemas.openxmlformats.org/presentationml/2006/main">
   <p:cSld>
     <p:spTree>
       <p:nvGrpSpPr>
@@ -4739,12 +5585,12 @@
       </p:grpSpPr>
       <p:sp>
         <p:nvSpPr>
-          <p:cNvPr name="Freeform 2" id="2"/>
+          <p:cNvPr id="2" name="Freeform 2"/>
           <p:cNvSpPr/>
           <p:nvPr/>
         </p:nvSpPr>
         <p:spPr>
-          <a:xfrm flipH="false" flipV="false" rot="0">
+          <a:xfrm>
             <a:off x="0" y="0"/>
             <a:ext cx="18288000" cy="10287000"/>
           </a:xfrm>
@@ -4753,9 +5599,9 @@
             <a:gdLst/>
             <a:ahLst/>
             <a:cxnLst/>
-            <a:rect r="r" b="b" t="t" l="l"/>
+            <a:rect l="l" t="t" r="r" b="b"/>
             <a:pathLst>
-              <a:path h="10287000" w="18288000">
+              <a:path w="18288000" h="10287000">
                 <a:moveTo>
                   <a:pt x="0" y="0"/>
                 </a:moveTo>
@@ -4778,19 +5624,19 @@
           <a:blipFill>
             <a:blip r:embed="rId2"/>
             <a:stretch>
-              <a:fillRect l="0" t="0" r="0" b="0"/>
+              <a:fillRect/>
             </a:stretch>
           </a:blipFill>
         </p:spPr>
       </p:sp>
       <p:grpSp>
         <p:nvGrpSpPr>
-          <p:cNvPr name="Group 3" id="3"/>
+          <p:cNvPr id="3" name="Group 3"/>
           <p:cNvGrpSpPr/>
           <p:nvPr/>
         </p:nvGrpSpPr>
         <p:grpSpPr>
-          <a:xfrm rot="0">
+          <a:xfrm>
             <a:off x="11982450" y="8997950"/>
             <a:ext cx="2514600" cy="260350"/>
             <a:chOff x="0" y="0"/>
@@ -4799,12 +5645,12 @@
         </p:grpSpPr>
         <p:sp>
           <p:nvSpPr>
-            <p:cNvPr name="Freeform 4" id="4"/>
+            <p:cNvPr id="4" name="Freeform 4"/>
             <p:cNvSpPr/>
             <p:nvPr/>
           </p:nvSpPr>
           <p:spPr>
-            <a:xfrm flipH="false" flipV="false" rot="0">
+            <a:xfrm>
               <a:off x="0" y="0"/>
               <a:ext cx="662281" cy="68570"/>
             </a:xfrm>
@@ -4813,9 +5659,9 @@
               <a:gdLst/>
               <a:ahLst/>
               <a:cxnLst/>
-              <a:rect r="r" b="b" t="t" l="l"/>
+              <a:rect l="l" t="t" r="r" b="b"/>
               <a:pathLst>
-                <a:path h="68570" w="662281">
+                <a:path w="662281" h="68570">
                   <a:moveTo>
                     <a:pt x="0" y="0"/>
                   </a:moveTo>
@@ -4839,8 +5685,8 @@
         </p:sp>
         <p:sp>
           <p:nvSpPr>
-            <p:cNvPr name="TextBox 5" id="5"/>
-            <p:cNvSpPr txBox="true"/>
+            <p:cNvPr id="5" name="TextBox 5"/>
+            <p:cNvSpPr txBox="1"/>
             <p:nvPr/>
           </p:nvSpPr>
           <p:spPr>
@@ -4853,7 +5699,7 @@
             </a:prstGeom>
           </p:spPr>
           <p:txBody>
-            <a:bodyPr anchor="ctr" rtlCol="false" tIns="50800" lIns="50800" bIns="50800" rIns="50800"/>
+            <a:bodyPr lIns="50800" tIns="50800" rIns="50800" bIns="50800" rtlCol="0" anchor="ctr"/>
             <a:lstStyle/>
             <a:p>
               <a:pPr algn="ctr">
@@ -4861,18 +5707,19 @@
                   <a:spcPts val="2659"/>
                 </a:lnSpc>
               </a:pPr>
+              <a:endParaRPr/>
             </a:p>
           </p:txBody>
         </p:sp>
       </p:grpSp>
       <p:sp>
         <p:nvSpPr>
-          <p:cNvPr name="TextBox 6" id="6"/>
-          <p:cNvSpPr txBox="true"/>
+          <p:cNvPr id="6" name="TextBox 6"/>
+          <p:cNvSpPr txBox="1"/>
           <p:nvPr/>
         </p:nvSpPr>
         <p:spPr>
-          <a:xfrm rot="0">
+          <a:xfrm>
             <a:off x="6389756" y="895527"/>
             <a:ext cx="6150317" cy="954368"/>
           </a:xfrm>
@@ -4881,7 +5728,7 @@
           </a:prstGeom>
         </p:spPr>
         <p:txBody>
-          <a:bodyPr anchor="t" rtlCol="false" tIns="0" lIns="0" bIns="0" rIns="0">
+          <a:bodyPr lIns="0" tIns="0" rIns="0" bIns="0" rtlCol="0" anchor="t">
             <a:spAutoFit/>
           </a:bodyPr>
           <a:lstStyle/>
@@ -4892,7 +5739,7 @@
               </a:lnSpc>
             </a:pPr>
             <a:r>
-              <a:rPr lang="en-US" b="true" sz="5551">
+              <a:rPr lang="en-US" sz="5551" b="1">
                 <a:solidFill>
                   <a:srgbClr val="000000"/>
                 </a:solidFill>
@@ -4908,12 +5755,12 @@
       </p:sp>
       <p:sp>
         <p:nvSpPr>
-          <p:cNvPr name="TextBox 7" id="7"/>
-          <p:cNvSpPr txBox="true"/>
+          <p:cNvPr id="7" name="TextBox 7"/>
+          <p:cNvSpPr txBox="1"/>
           <p:nvPr/>
         </p:nvSpPr>
         <p:spPr>
-          <a:xfrm rot="0">
+          <a:xfrm>
             <a:off x="2728746" y="2531980"/>
             <a:ext cx="14530554" cy="6262981"/>
           </a:xfrm>
@@ -4922,12 +5769,12 @@
           </a:prstGeom>
         </p:spPr>
         <p:txBody>
-          <a:bodyPr anchor="t" rtlCol="false" tIns="0" lIns="0" bIns="0" rIns="0">
+          <a:bodyPr lIns="0" tIns="0" rIns="0" bIns="0" rtlCol="0" anchor="t">
             <a:spAutoFit/>
           </a:bodyPr>
           <a:lstStyle/>
           <a:p>
-            <a:pPr algn="l" marL="847608" indent="-423804" lvl="1">
+            <a:pPr marL="847608" lvl="1" indent="-423804" algn="l">
               <a:lnSpc>
                 <a:spcPts val="5496"/>
               </a:lnSpc>
@@ -4948,7 +5795,7 @@
             </a:r>
           </a:p>
           <a:p>
-            <a:pPr algn="l" marL="847608" indent="-423804" lvl="1">
+            <a:pPr marL="847608" lvl="1" indent="-423804" algn="l">
               <a:lnSpc>
                 <a:spcPts val="5496"/>
               </a:lnSpc>
@@ -4969,7 +5816,7 @@
             </a:r>
           </a:p>
           <a:p>
-            <a:pPr algn="l" marL="847608" indent="-423804" lvl="1">
+            <a:pPr marL="847608" lvl="1" indent="-423804" algn="l">
               <a:lnSpc>
                 <a:spcPts val="5496"/>
               </a:lnSpc>
@@ -4990,7 +5837,7 @@
             </a:r>
           </a:p>
           <a:p>
-            <a:pPr algn="l" marL="847608" indent="-423804" lvl="1">
+            <a:pPr marL="847608" lvl="1" indent="-423804" algn="l">
               <a:lnSpc>
                 <a:spcPts val="5496"/>
               </a:lnSpc>
@@ -5011,7 +5858,7 @@
             </a:r>
           </a:p>
           <a:p>
-            <a:pPr algn="l" marL="847608" indent="-423804" lvl="1">
+            <a:pPr marL="847608" lvl="1" indent="-423804" algn="l">
               <a:lnSpc>
                 <a:spcPts val="5496"/>
               </a:lnSpc>
@@ -5032,7 +5879,7 @@
             </a:r>
           </a:p>
           <a:p>
-            <a:pPr algn="l" marL="847608" indent="-423804" lvl="1">
+            <a:pPr marL="847608" lvl="1" indent="-423804" algn="l">
               <a:lnSpc>
                 <a:spcPts val="5496"/>
               </a:lnSpc>
@@ -5053,7 +5900,7 @@
             </a:r>
           </a:p>
           <a:p>
-            <a:pPr algn="l" marL="847608" indent="-423804" lvl="1">
+            <a:pPr marL="847608" lvl="1" indent="-423804" algn="l">
               <a:lnSpc>
                 <a:spcPts val="5496"/>
               </a:lnSpc>
@@ -5074,7 +5921,7 @@
             </a:r>
           </a:p>
           <a:p>
-            <a:pPr algn="l" marL="847608" indent="-423804" lvl="1">
+            <a:pPr marL="847608" lvl="1" indent="-423804" algn="l">
               <a:lnSpc>
                 <a:spcPts val="5496"/>
               </a:lnSpc>
@@ -5103,6 +5950,15 @@
                 <a:spcPct val="0"/>
               </a:spcBef>
             </a:pPr>
+            <a:endParaRPr lang="en-US" sz="3925">
+              <a:solidFill>
+                <a:srgbClr val="000000"/>
+              </a:solidFill>
+              <a:latin typeface="Poppins"/>
+              <a:ea typeface="Poppins"/>
+              <a:cs typeface="Poppins"/>
+              <a:sym typeface="Poppins"/>
+            </a:endParaRPr>
           </a:p>
         </p:txBody>
       </p:sp>
@@ -5115,7 +5971,7 @@
 </file>
 
 <file path=ppt/slides/slide6.xml><?xml version="1.0" encoding="utf-8"?>
-<p:sld xmlns:p="http://schemas.openxmlformats.org/presentationml/2006/main" xmlns:a="http://schemas.openxmlformats.org/drawingml/2006/main" xmlns:r="http://schemas.openxmlformats.org/officeDocument/2006/relationships">
+<p:sld xmlns:a="http://schemas.openxmlformats.org/drawingml/2006/main" xmlns:r="http://schemas.openxmlformats.org/officeDocument/2006/relationships" xmlns:p="http://schemas.openxmlformats.org/presentationml/2006/main">
   <p:cSld>
     <p:spTree>
       <p:nvGrpSpPr>
@@ -5133,12 +5989,12 @@
       </p:grpSpPr>
       <p:sp>
         <p:nvSpPr>
-          <p:cNvPr name="Freeform 2" id="2"/>
+          <p:cNvPr id="2" name="Freeform 2"/>
           <p:cNvSpPr/>
           <p:nvPr/>
         </p:nvSpPr>
         <p:spPr>
-          <a:xfrm flipH="false" flipV="false" rot="0">
+          <a:xfrm>
             <a:off x="0" y="0"/>
             <a:ext cx="18288000" cy="10287000"/>
           </a:xfrm>
@@ -5147,9 +6003,9 @@
             <a:gdLst/>
             <a:ahLst/>
             <a:cxnLst/>
-            <a:rect r="r" b="b" t="t" l="l"/>
+            <a:rect l="l" t="t" r="r" b="b"/>
             <a:pathLst>
-              <a:path h="10287000" w="18288000">
+              <a:path w="18288000" h="10287000">
                 <a:moveTo>
                   <a:pt x="0" y="0"/>
                 </a:moveTo>
@@ -5172,19 +6028,19 @@
           <a:blipFill>
             <a:blip r:embed="rId2"/>
             <a:stretch>
-              <a:fillRect l="0" t="0" r="0" b="0"/>
+              <a:fillRect/>
             </a:stretch>
           </a:blipFill>
         </p:spPr>
       </p:sp>
       <p:grpSp>
         <p:nvGrpSpPr>
-          <p:cNvPr name="Group 3" id="3"/>
+          <p:cNvPr id="3" name="Group 3"/>
           <p:cNvGrpSpPr/>
           <p:nvPr/>
         </p:nvGrpSpPr>
         <p:grpSpPr>
-          <a:xfrm rot="0">
+          <a:xfrm>
             <a:off x="1028700" y="8997950"/>
             <a:ext cx="2514600" cy="260350"/>
             <a:chOff x="0" y="0"/>
@@ -5193,12 +6049,12 @@
         </p:grpSpPr>
         <p:sp>
           <p:nvSpPr>
-            <p:cNvPr name="Freeform 4" id="4"/>
+            <p:cNvPr id="4" name="Freeform 4"/>
             <p:cNvSpPr/>
             <p:nvPr/>
           </p:nvSpPr>
           <p:spPr>
-            <a:xfrm flipH="false" flipV="false" rot="0">
+            <a:xfrm>
               <a:off x="0" y="0"/>
               <a:ext cx="662281" cy="68570"/>
             </a:xfrm>
@@ -5207,9 +6063,9 @@
               <a:gdLst/>
               <a:ahLst/>
               <a:cxnLst/>
-              <a:rect r="r" b="b" t="t" l="l"/>
+              <a:rect l="l" t="t" r="r" b="b"/>
               <a:pathLst>
-                <a:path h="68570" w="662281">
+                <a:path w="662281" h="68570">
                   <a:moveTo>
                     <a:pt x="0" y="0"/>
                   </a:moveTo>
@@ -5233,8 +6089,8 @@
         </p:sp>
         <p:sp>
           <p:nvSpPr>
-            <p:cNvPr name="TextBox 5" id="5"/>
-            <p:cNvSpPr txBox="true"/>
+            <p:cNvPr id="5" name="TextBox 5"/>
+            <p:cNvSpPr txBox="1"/>
             <p:nvPr/>
           </p:nvSpPr>
           <p:spPr>
@@ -5247,7 +6103,7 @@
             </a:prstGeom>
           </p:spPr>
           <p:txBody>
-            <a:bodyPr anchor="ctr" rtlCol="false" tIns="50800" lIns="50800" bIns="50800" rIns="50800"/>
+            <a:bodyPr lIns="50800" tIns="50800" rIns="50800" bIns="50800" rtlCol="0" anchor="ctr"/>
             <a:lstStyle/>
             <a:p>
               <a:pPr algn="ctr">
@@ -5255,18 +6111,19 @@
                   <a:spcPts val="2659"/>
                 </a:lnSpc>
               </a:pPr>
+              <a:endParaRPr/>
             </a:p>
           </p:txBody>
         </p:sp>
       </p:grpSp>
       <p:sp>
         <p:nvSpPr>
-          <p:cNvPr name="Freeform 6" id="6"/>
+          <p:cNvPr id="6" name="Freeform 6"/>
           <p:cNvSpPr/>
           <p:nvPr/>
         </p:nvSpPr>
         <p:spPr>
-          <a:xfrm flipH="false" flipV="false" rot="0">
+          <a:xfrm>
             <a:off x="9144000" y="1828763"/>
             <a:ext cx="9221944" cy="6702764"/>
           </a:xfrm>
@@ -5275,9 +6132,9 @@
             <a:gdLst/>
             <a:ahLst/>
             <a:cxnLst/>
-            <a:rect r="r" b="b" t="t" l="l"/>
+            <a:rect l="l" t="t" r="r" b="b"/>
             <a:pathLst>
-              <a:path h="6702764" w="9221944">
+              <a:path w="9221944" h="6702764">
                 <a:moveTo>
                   <a:pt x="0" y="0"/>
                 </a:moveTo>
@@ -5300,19 +6157,19 @@
           <a:blipFill>
             <a:blip r:embed="rId3"/>
             <a:stretch>
-              <a:fillRect l="-3739" t="0" r="-3739" b="0"/>
+              <a:fillRect l="-3739" r="-3739"/>
             </a:stretch>
           </a:blipFill>
         </p:spPr>
       </p:sp>
       <p:sp>
         <p:nvSpPr>
-          <p:cNvPr name="TextBox 7" id="7"/>
-          <p:cNvSpPr txBox="true"/>
+          <p:cNvPr id="7" name="TextBox 7"/>
+          <p:cNvSpPr txBox="1"/>
           <p:nvPr/>
         </p:nvSpPr>
         <p:spPr>
-          <a:xfrm rot="0">
+          <a:xfrm>
             <a:off x="2958343" y="890905"/>
             <a:ext cx="5634574" cy="937858"/>
           </a:xfrm>
@@ -5321,7 +6178,7 @@
           </a:prstGeom>
         </p:spPr>
         <p:txBody>
-          <a:bodyPr anchor="t" rtlCol="false" tIns="0" lIns="0" bIns="0" rIns="0">
+          <a:bodyPr lIns="0" tIns="0" rIns="0" bIns="0" rtlCol="0" anchor="t">
             <a:spAutoFit/>
           </a:bodyPr>
           <a:lstStyle/>
@@ -5332,7 +6189,7 @@
               </a:lnSpc>
             </a:pPr>
             <a:r>
-              <a:rPr lang="en-US" b="true" sz="5451">
+              <a:rPr lang="en-US" sz="5451" b="1">
                 <a:solidFill>
                   <a:srgbClr val="000000"/>
                 </a:solidFill>
@@ -5348,12 +6205,12 @@
       </p:sp>
       <p:sp>
         <p:nvSpPr>
-          <p:cNvPr name="TextBox 8" id="8"/>
-          <p:cNvSpPr txBox="true"/>
+          <p:cNvPr id="8" name="TextBox 8"/>
+          <p:cNvSpPr txBox="1"/>
           <p:nvPr/>
         </p:nvSpPr>
         <p:spPr>
-          <a:xfrm rot="0">
+          <a:xfrm>
             <a:off x="497530" y="2462662"/>
             <a:ext cx="8858296" cy="5266426"/>
           </a:xfrm>
@@ -5362,12 +6219,12 @@
           </a:prstGeom>
         </p:spPr>
         <p:txBody>
-          <a:bodyPr anchor="t" rtlCol="false" tIns="0" lIns="0" bIns="0" rIns="0">
+          <a:bodyPr lIns="0" tIns="0" rIns="0" bIns="0" rtlCol="0" anchor="t">
             <a:spAutoFit/>
           </a:bodyPr>
           <a:lstStyle/>
           <a:p>
-            <a:pPr algn="l" marL="721605" indent="-360802" lvl="1">
+            <a:pPr marL="721605" lvl="1" indent="-360802" algn="l">
               <a:lnSpc>
                 <a:spcPts val="4679"/>
               </a:lnSpc>
@@ -5388,7 +6245,7 @@
             </a:r>
           </a:p>
           <a:p>
-            <a:pPr algn="l" marL="721605" indent="-360802" lvl="1">
+            <a:pPr marL="721605" lvl="1" indent="-360802" algn="l">
               <a:lnSpc>
                 <a:spcPts val="4679"/>
               </a:lnSpc>
@@ -5409,7 +6266,7 @@
             </a:r>
           </a:p>
           <a:p>
-            <a:pPr algn="l" marL="721605" indent="-360802" lvl="1">
+            <a:pPr marL="721605" lvl="1" indent="-360802" algn="l">
               <a:lnSpc>
                 <a:spcPts val="4679"/>
               </a:lnSpc>
@@ -5430,7 +6287,7 @@
             </a:r>
           </a:p>
           <a:p>
-            <a:pPr algn="l" marL="721605" indent="-360802" lvl="1">
+            <a:pPr marL="721605" lvl="1" indent="-360802" algn="l">
               <a:lnSpc>
                 <a:spcPts val="4679"/>
               </a:lnSpc>
@@ -5459,6 +6316,15 @@
                 <a:spcPct val="0"/>
               </a:spcBef>
             </a:pPr>
+            <a:endParaRPr lang="en-US" sz="3342">
+              <a:solidFill>
+                <a:srgbClr val="000000"/>
+              </a:solidFill>
+              <a:latin typeface="Poppins"/>
+              <a:ea typeface="Poppins"/>
+              <a:cs typeface="Poppins"/>
+              <a:sym typeface="Poppins"/>
+            </a:endParaRPr>
           </a:p>
         </p:txBody>
       </p:sp>
@@ -5471,7 +6337,7 @@
 </file>
 
 <file path=ppt/slides/slide7.xml><?xml version="1.0" encoding="utf-8"?>
-<p:sld xmlns:p="http://schemas.openxmlformats.org/presentationml/2006/main" xmlns:a="http://schemas.openxmlformats.org/drawingml/2006/main" xmlns:r="http://schemas.openxmlformats.org/officeDocument/2006/relationships">
+<p:sld xmlns:a="http://schemas.openxmlformats.org/drawingml/2006/main" xmlns:r="http://schemas.openxmlformats.org/officeDocument/2006/relationships" xmlns:p="http://schemas.openxmlformats.org/presentationml/2006/main">
   <p:cSld>
     <p:spTree>
       <p:nvGrpSpPr>
@@ -5489,12 +6355,12 @@
       </p:grpSpPr>
       <p:sp>
         <p:nvSpPr>
-          <p:cNvPr name="Freeform 2" id="2"/>
+          <p:cNvPr id="2" name="Freeform 2"/>
           <p:cNvSpPr/>
           <p:nvPr/>
         </p:nvSpPr>
         <p:spPr>
-          <a:xfrm flipH="false" flipV="false" rot="0">
+          <a:xfrm>
             <a:off x="0" y="0"/>
             <a:ext cx="18288000" cy="10287000"/>
           </a:xfrm>
@@ -5503,9 +6369,9 @@
             <a:gdLst/>
             <a:ahLst/>
             <a:cxnLst/>
-            <a:rect r="r" b="b" t="t" l="l"/>
+            <a:rect l="l" t="t" r="r" b="b"/>
             <a:pathLst>
-              <a:path h="10287000" w="18288000">
+              <a:path w="18288000" h="10287000">
                 <a:moveTo>
                   <a:pt x="0" y="0"/>
                 </a:moveTo>
@@ -5528,19 +6394,19 @@
           <a:blipFill>
             <a:blip r:embed="rId2"/>
             <a:stretch>
-              <a:fillRect l="0" t="0" r="0" b="0"/>
+              <a:fillRect/>
             </a:stretch>
           </a:blipFill>
         </p:spPr>
       </p:sp>
       <p:sp>
         <p:nvSpPr>
-          <p:cNvPr name="TextBox 3" id="3"/>
-          <p:cNvSpPr txBox="true"/>
+          <p:cNvPr id="3" name="TextBox 3"/>
+          <p:cNvSpPr txBox="1"/>
           <p:nvPr/>
         </p:nvSpPr>
         <p:spPr>
-          <a:xfrm rot="0">
+          <a:xfrm>
             <a:off x="3979939" y="1311765"/>
             <a:ext cx="10328122" cy="1151174"/>
           </a:xfrm>
@@ -5549,7 +6415,7 @@
           </a:prstGeom>
         </p:spPr>
         <p:txBody>
-          <a:bodyPr anchor="t" rtlCol="false" tIns="0" lIns="0" bIns="0" rIns="0">
+          <a:bodyPr lIns="0" tIns="0" rIns="0" bIns="0" rtlCol="0" anchor="t">
             <a:spAutoFit/>
           </a:bodyPr>
           <a:lstStyle/>
@@ -5560,7 +6426,7 @@
               </a:lnSpc>
             </a:pPr>
             <a:r>
-              <a:rPr lang="en-US" b="true" sz="6656">
+              <a:rPr lang="en-US" sz="6656" b="1">
                 <a:solidFill>
                   <a:srgbClr val="303642"/>
                 </a:solidFill>
@@ -5576,12 +6442,12 @@
       </p:sp>
       <p:sp>
         <p:nvSpPr>
-          <p:cNvPr name="TextBox 4" id="4"/>
-          <p:cNvSpPr txBox="true"/>
+          <p:cNvPr id="4" name="TextBox 4"/>
+          <p:cNvSpPr txBox="1"/>
           <p:nvPr/>
         </p:nvSpPr>
         <p:spPr>
-          <a:xfrm rot="0">
+          <a:xfrm>
             <a:off x="1925332" y="3237083"/>
             <a:ext cx="15333968" cy="5487817"/>
           </a:xfrm>
@@ -5590,12 +6456,12 @@
           </a:prstGeom>
         </p:spPr>
         <p:txBody>
-          <a:bodyPr anchor="t" rtlCol="false" tIns="0" lIns="0" bIns="0" rIns="0">
+          <a:bodyPr lIns="0" tIns="0" rIns="0" bIns="0" rtlCol="0" anchor="t">
             <a:spAutoFit/>
           </a:bodyPr>
           <a:lstStyle/>
           <a:p>
-            <a:pPr algn="l" marL="959506" indent="-479753" lvl="1">
+            <a:pPr marL="959506" lvl="1" indent="-479753" algn="l">
               <a:lnSpc>
                 <a:spcPts val="6221"/>
               </a:lnSpc>
@@ -5616,7 +6482,7 @@
             </a:r>
           </a:p>
           <a:p>
-            <a:pPr algn="l" marL="959506" indent="-479753" lvl="1">
+            <a:pPr marL="959506" lvl="1" indent="-479753" algn="l">
               <a:lnSpc>
                 <a:spcPts val="6221"/>
               </a:lnSpc>
@@ -5637,7 +6503,7 @@
             </a:r>
           </a:p>
           <a:p>
-            <a:pPr algn="l" marL="959506" indent="-479753" lvl="1">
+            <a:pPr marL="959506" lvl="1" indent="-479753" algn="l">
               <a:lnSpc>
                 <a:spcPts val="6221"/>
               </a:lnSpc>
@@ -5658,7 +6524,7 @@
             </a:r>
           </a:p>
           <a:p>
-            <a:pPr algn="l" marL="959506" indent="-479753" lvl="1">
+            <a:pPr marL="959506" lvl="1" indent="-479753" algn="l">
               <a:lnSpc>
                 <a:spcPts val="6221"/>
               </a:lnSpc>
@@ -5687,6 +6553,15 @@
                 <a:spcPct val="0"/>
               </a:spcBef>
             </a:pPr>
+            <a:endParaRPr lang="en-US" sz="4444">
+              <a:solidFill>
+                <a:srgbClr val="303642"/>
+              </a:solidFill>
+              <a:latin typeface="Poppins"/>
+              <a:ea typeface="Poppins"/>
+              <a:cs typeface="Poppins"/>
+              <a:sym typeface="Poppins"/>
+            </a:endParaRPr>
           </a:p>
         </p:txBody>
       </p:sp>
@@ -5699,7 +6574,7 @@
 </file>
 
 <file path=ppt/slides/slide8.xml><?xml version="1.0" encoding="utf-8"?>
-<p:sld xmlns:p="http://schemas.openxmlformats.org/presentationml/2006/main" xmlns:a="http://schemas.openxmlformats.org/drawingml/2006/main" xmlns:r="http://schemas.openxmlformats.org/officeDocument/2006/relationships">
+<p:sld xmlns:a="http://schemas.openxmlformats.org/drawingml/2006/main" xmlns:r="http://schemas.openxmlformats.org/officeDocument/2006/relationships" xmlns:p="http://schemas.openxmlformats.org/presentationml/2006/main">
   <p:cSld>
     <p:spTree>
       <p:nvGrpSpPr>
@@ -5717,12 +6592,12 @@
       </p:grpSpPr>
       <p:sp>
         <p:nvSpPr>
-          <p:cNvPr name="Freeform 2" id="2"/>
+          <p:cNvPr id="2" name="Freeform 2"/>
           <p:cNvSpPr/>
           <p:nvPr/>
         </p:nvSpPr>
         <p:spPr>
-          <a:xfrm flipH="false" flipV="false" rot="0">
+          <a:xfrm>
             <a:off x="0" y="0"/>
             <a:ext cx="18288000" cy="10287000"/>
           </a:xfrm>
@@ -5731,9 +6606,9 @@
             <a:gdLst/>
             <a:ahLst/>
             <a:cxnLst/>
-            <a:rect r="r" b="b" t="t" l="l"/>
+            <a:rect l="l" t="t" r="r" b="b"/>
             <a:pathLst>
-              <a:path h="10287000" w="18288000">
+              <a:path w="18288000" h="10287000">
                 <a:moveTo>
                   <a:pt x="0" y="0"/>
                 </a:moveTo>
@@ -5756,19 +6631,19 @@
           <a:blipFill>
             <a:blip r:embed="rId2"/>
             <a:stretch>
-              <a:fillRect l="0" t="-9259" r="0" b="-9259"/>
+              <a:fillRect t="-9259" b="-9259"/>
             </a:stretch>
           </a:blipFill>
         </p:spPr>
       </p:sp>
       <p:grpSp>
         <p:nvGrpSpPr>
-          <p:cNvPr name="Group 3" id="3"/>
+          <p:cNvPr id="3" name="Group 3"/>
           <p:cNvGrpSpPr/>
           <p:nvPr/>
         </p:nvGrpSpPr>
         <p:grpSpPr>
-          <a:xfrm rot="0">
+          <a:xfrm>
             <a:off x="-702328" y="4246706"/>
             <a:ext cx="5245100" cy="1332778"/>
             <a:chOff x="0" y="0"/>
@@ -5777,12 +6652,12 @@
         </p:grpSpPr>
         <p:sp>
           <p:nvSpPr>
-            <p:cNvPr name="Freeform 4" id="4"/>
+            <p:cNvPr id="4" name="Freeform 4"/>
             <p:cNvSpPr/>
             <p:nvPr/>
           </p:nvSpPr>
           <p:spPr>
-            <a:xfrm flipH="false" flipV="false" rot="0">
+            <a:xfrm>
               <a:off x="0" y="0"/>
               <a:ext cx="1381426" cy="351020"/>
             </a:xfrm>
@@ -5791,9 +6666,9 @@
               <a:gdLst/>
               <a:ahLst/>
               <a:cxnLst/>
-              <a:rect r="r" b="b" t="t" l="l"/>
+              <a:rect l="l" t="t" r="r" b="b"/>
               <a:pathLst>
-                <a:path h="351020" w="1381426">
+                <a:path w="1381426" h="351020">
                   <a:moveTo>
                     <a:pt x="75277" y="0"/>
                   </a:moveTo>
@@ -5860,8 +6735,8 @@
         </p:sp>
         <p:sp>
           <p:nvSpPr>
-            <p:cNvPr name="TextBox 5" id="5"/>
-            <p:cNvSpPr txBox="true"/>
+            <p:cNvPr id="5" name="TextBox 5"/>
+            <p:cNvSpPr txBox="1"/>
             <p:nvPr/>
           </p:nvSpPr>
           <p:spPr>
@@ -5874,7 +6749,7 @@
             </a:prstGeom>
           </p:spPr>
           <p:txBody>
-            <a:bodyPr anchor="ctr" rtlCol="false" tIns="50800" lIns="50800" bIns="50800" rIns="50800"/>
+            <a:bodyPr lIns="50800" tIns="50800" rIns="50800" bIns="50800" rtlCol="0" anchor="ctr"/>
             <a:lstStyle/>
             <a:p>
               <a:pPr algn="ctr">
@@ -5882,18 +6757,19 @@
                   <a:spcPts val="2659"/>
                 </a:lnSpc>
               </a:pPr>
+              <a:endParaRPr/>
             </a:p>
           </p:txBody>
         </p:sp>
       </p:grpSp>
       <p:grpSp>
         <p:nvGrpSpPr>
-          <p:cNvPr name="Group 6" id="6"/>
+          <p:cNvPr id="6" name="Group 6"/>
           <p:cNvGrpSpPr/>
           <p:nvPr/>
         </p:nvGrpSpPr>
         <p:grpSpPr>
-          <a:xfrm rot="0">
+          <a:xfrm>
             <a:off x="13745228" y="4246706"/>
             <a:ext cx="5118100" cy="1332778"/>
             <a:chOff x="0" y="0"/>
@@ -5902,12 +6778,12 @@
         </p:grpSpPr>
         <p:sp>
           <p:nvSpPr>
-            <p:cNvPr name="Freeform 7" id="7"/>
+            <p:cNvPr id="7" name="Freeform 7"/>
             <p:cNvSpPr/>
             <p:nvPr/>
           </p:nvSpPr>
           <p:spPr>
-            <a:xfrm flipH="false" flipV="false" rot="0">
+            <a:xfrm>
               <a:off x="0" y="0"/>
               <a:ext cx="1347977" cy="351020"/>
             </a:xfrm>
@@ -5916,9 +6792,9 @@
               <a:gdLst/>
               <a:ahLst/>
               <a:cxnLst/>
-              <a:rect r="r" b="b" t="t" l="l"/>
+              <a:rect l="l" t="t" r="r" b="b"/>
               <a:pathLst>
-                <a:path h="351020" w="1347977">
+                <a:path w="1347977" h="351020">
                   <a:moveTo>
                     <a:pt x="77145" y="0"/>
                   </a:moveTo>
@@ -5970,8 +6846,8 @@
         </p:sp>
         <p:sp>
           <p:nvSpPr>
-            <p:cNvPr name="TextBox 8" id="8"/>
-            <p:cNvSpPr txBox="true"/>
+            <p:cNvPr id="8" name="TextBox 8"/>
+            <p:cNvSpPr txBox="1"/>
             <p:nvPr/>
           </p:nvSpPr>
           <p:spPr>
@@ -5984,7 +6860,7 @@
             </a:prstGeom>
           </p:spPr>
           <p:txBody>
-            <a:bodyPr anchor="ctr" rtlCol="false" tIns="50800" lIns="50800" bIns="50800" rIns="50800"/>
+            <a:bodyPr lIns="50800" tIns="50800" rIns="50800" bIns="50800" rtlCol="0" anchor="ctr"/>
             <a:lstStyle/>
             <a:p>
               <a:pPr algn="ctr">
@@ -5992,18 +6868,19 @@
                   <a:spcPts val="2659"/>
                 </a:lnSpc>
               </a:pPr>
+              <a:endParaRPr/>
             </a:p>
           </p:txBody>
         </p:sp>
       </p:grpSp>
       <p:sp>
         <p:nvSpPr>
-          <p:cNvPr name="TextBox 9" id="9"/>
-          <p:cNvSpPr txBox="true"/>
+          <p:cNvPr id="9" name="TextBox 9"/>
+          <p:cNvSpPr txBox="1"/>
           <p:nvPr/>
         </p:nvSpPr>
         <p:spPr>
-          <a:xfrm rot="0">
+          <a:xfrm>
             <a:off x="4933297" y="4314103"/>
             <a:ext cx="8421405" cy="1293316"/>
           </a:xfrm>
@@ -6012,7 +6889,7 @@
           </a:prstGeom>
         </p:spPr>
         <p:txBody>
-          <a:bodyPr anchor="t" rtlCol="false" tIns="0" lIns="0" bIns="0" rIns="0">
+          <a:bodyPr lIns="0" tIns="0" rIns="0" bIns="0" rtlCol="0" anchor="t">
             <a:spAutoFit/>
           </a:bodyPr>
           <a:lstStyle/>
@@ -6023,7 +6900,7 @@
               </a:lnSpc>
             </a:pPr>
             <a:r>
-              <a:rPr lang="en-US" b="true" sz="7582">
+              <a:rPr lang="en-US" sz="7582" b="1">
                 <a:solidFill>
                   <a:srgbClr val="004AAD"/>
                 </a:solidFill>
@@ -6039,12 +6916,12 @@
       </p:sp>
       <p:sp>
         <p:nvSpPr>
-          <p:cNvPr name="Freeform 10" id="10"/>
+          <p:cNvPr id="10" name="Freeform 10"/>
           <p:cNvSpPr/>
           <p:nvPr/>
         </p:nvSpPr>
         <p:spPr>
-          <a:xfrm flipH="false" flipV="false" rot="0">
+          <a:xfrm>
             <a:off x="3784276" y="8083696"/>
             <a:ext cx="762324" cy="762324"/>
           </a:xfrm>
@@ -6053,9 +6930,9 @@
             <a:gdLst/>
             <a:ahLst/>
             <a:cxnLst/>
-            <a:rect r="r" b="b" t="t" l="l"/>
+            <a:rect l="l" t="t" r="r" b="b"/>
             <a:pathLst>
-              <a:path h="762324" w="762324">
+              <a:path w="762324" h="762324">
                 <a:moveTo>
                   <a:pt x="0" y="0"/>
                 </a:moveTo>
@@ -6084,19 +6961,19 @@
               </a:extLst>
             </a:blip>
             <a:stretch>
-              <a:fillRect l="0" t="0" r="0" b="0"/>
+              <a:fillRect/>
             </a:stretch>
           </a:blipFill>
         </p:spPr>
       </p:sp>
       <p:sp>
         <p:nvSpPr>
-          <p:cNvPr name="TextBox 11" id="11"/>
-          <p:cNvSpPr txBox="true"/>
+          <p:cNvPr id="11" name="TextBox 11"/>
+          <p:cNvSpPr txBox="1"/>
           <p:nvPr/>
         </p:nvSpPr>
         <p:spPr>
-          <a:xfrm rot="0">
+          <a:xfrm>
             <a:off x="5349748" y="7916250"/>
             <a:ext cx="9209297" cy="929770"/>
           </a:xfrm>
@@ -6105,12 +6982,12 @@
           </a:prstGeom>
         </p:spPr>
         <p:txBody>
-          <a:bodyPr anchor="t" rtlCol="false" tIns="0" lIns="0" bIns="0" rIns="0">
+          <a:bodyPr lIns="0" tIns="0" rIns="0" bIns="0" rtlCol="0" anchor="t">
             <a:spAutoFit/>
           </a:bodyPr>
           <a:lstStyle/>
           <a:p>
-            <a:pPr algn="l" marL="0" indent="0" lvl="0">
+            <a:pPr marL="0" lvl="0" indent="0" algn="l">
               <a:lnSpc>
                 <a:spcPts val="7619"/>
               </a:lnSpc>
